--- a/decks/Trans_02_Antibody-Identification-and-Complex-Serology.pptx
+++ b/decks/Trans_02_Antibody-Identification-and-Complex-Serology.pptx
@@ -47,9 +47,13 @@
     <p:sldId id="295" r:id="rId41"/>
     <p:sldId id="296" r:id="rId42"/>
     <p:sldId id="297" r:id="rId43"/>
+    <p:sldId id="306" r:id="rId57"/>
     <p:sldId id="298" r:id="rId44"/>
+    <p:sldId id="305" r:id="rId56"/>
     <p:sldId id="299" r:id="rId45"/>
+    <p:sldId id="304" r:id="rId55"/>
     <p:sldId id="300" r:id="rId46"/>
+    <p:sldId id="303" r:id="rId54"/>
     <p:sldId id="301" r:id="rId47"/>
     <p:sldId id="302" r:id="rId48"/>
   </p:sldIdLst>
@@ -4990,6 +4994,10 @@
           </a:solidFill>
           <a:ln/>
         </p:spPr>
+        <p:txBody>
+          <a:bodyPr/>
+          <a:p/>
+        </p:txBody>
       </p:sp>
       <p:sp>
         <p:nvSpPr>
@@ -5012,6 +5020,10 @@
           </a:solidFill>
           <a:ln/>
         </p:spPr>
+        <p:txBody>
+          <a:bodyPr/>
+          <a:p/>
+        </p:txBody>
       </p:sp>
       <p:sp>
         <p:nvSpPr>
@@ -5034,6 +5046,10 @@
           </a:solidFill>
           <a:ln/>
         </p:spPr>
+        <p:txBody>
+          <a:bodyPr/>
+          <a:p/>
+        </p:txBody>
       </p:sp>
       <p:sp>
         <p:nvSpPr>
@@ -5056,6 +5072,10 @@
           </a:solidFill>
           <a:ln/>
         </p:spPr>
+        <p:txBody>
+          <a:bodyPr/>
+          <a:p/>
+        </p:txBody>
       </p:sp>
       <p:sp>
         <p:nvSpPr>
@@ -5472,6 +5492,10 @@
             </a:outerShdw>
           </a:effectLst>
         </p:spPr>
+        <p:txBody>
+          <a:bodyPr/>
+          <a:p/>
+        </p:txBody>
       </p:sp>
       <p:sp>
         <p:nvSpPr>
@@ -5646,6 +5670,10 @@
             </a:outerShdw>
           </a:effectLst>
         </p:spPr>
+        <p:txBody>
+          <a:bodyPr/>
+          <a:p/>
+        </p:txBody>
       </p:sp>
       <p:sp>
         <p:nvSpPr>
@@ -5951,6 +5979,10 @@
           </a:solidFill>
           <a:ln/>
         </p:spPr>
+        <p:txBody>
+          <a:bodyPr/>
+          <a:p/>
+        </p:txBody>
       </p:sp>
       <p:sp>
         <p:nvSpPr>
@@ -5973,6 +6005,10 @@
           </a:solidFill>
           <a:ln/>
         </p:spPr>
+        <p:txBody>
+          <a:bodyPr/>
+          <a:p/>
+        </p:txBody>
       </p:sp>
       <p:sp>
         <p:nvSpPr>
@@ -6234,6 +6270,10 @@
             </a:outerShdw>
           </a:effectLst>
         </p:spPr>
+        <p:txBody>
+          <a:bodyPr/>
+          <a:p/>
+        </p:txBody>
       </p:sp>
       <p:sp>
         <p:nvSpPr>
@@ -6314,6 +6354,10 @@
             <a:tailEnd type="triangle"/>
           </a:ln>
         </p:spPr>
+        <p:txBody>
+          <a:bodyPr/>
+          <a:p/>
+        </p:txBody>
       </p:sp>
       <p:sp>
         <p:nvSpPr>
@@ -6348,6 +6392,10 @@
             </a:outerShdw>
           </a:effectLst>
         </p:spPr>
+        <p:txBody>
+          <a:bodyPr/>
+          <a:p/>
+        </p:txBody>
       </p:sp>
       <p:sp>
         <p:nvSpPr>
@@ -6428,6 +6476,10 @@
             <a:tailEnd type="triangle"/>
           </a:ln>
         </p:spPr>
+        <p:txBody>
+          <a:bodyPr/>
+          <a:p/>
+        </p:txBody>
       </p:sp>
       <p:sp>
         <p:nvSpPr>
@@ -6462,6 +6514,10 @@
             </a:outerShdw>
           </a:effectLst>
         </p:spPr>
+        <p:txBody>
+          <a:bodyPr/>
+          <a:p/>
+        </p:txBody>
       </p:sp>
       <p:sp>
         <p:nvSpPr>
@@ -6542,6 +6598,10 @@
             <a:tailEnd type="triangle"/>
           </a:ln>
         </p:spPr>
+        <p:txBody>
+          <a:bodyPr/>
+          <a:p/>
+        </p:txBody>
       </p:sp>
       <p:sp>
         <p:nvSpPr>
@@ -6576,6 +6636,10 @@
             </a:outerShdw>
           </a:effectLst>
         </p:spPr>
+        <p:txBody>
+          <a:bodyPr/>
+          <a:p/>
+        </p:txBody>
       </p:sp>
       <p:sp>
         <p:nvSpPr>
@@ -6661,6 +6725,10 @@
             </a:outerShdw>
           </a:effectLst>
         </p:spPr>
+        <p:txBody>
+          <a:bodyPr/>
+          <a:p/>
+        </p:txBody>
       </p:sp>
       <p:sp>
         <p:nvSpPr>
@@ -7029,6 +7097,10 @@
             </a:outerShdw>
           </a:effectLst>
         </p:spPr>
+        <p:txBody>
+          <a:bodyPr/>
+          <a:p/>
+        </p:txBody>
       </p:sp>
       <p:sp>
         <p:nvSpPr>
@@ -7203,6 +7275,10 @@
             </a:outerShdw>
           </a:effectLst>
         </p:spPr>
+        <p:txBody>
+          <a:bodyPr/>
+          <a:p/>
+        </p:txBody>
       </p:sp>
       <p:sp>
         <p:nvSpPr>
@@ -7508,6 +7584,10 @@
           </a:solidFill>
           <a:ln/>
         </p:spPr>
+        <p:txBody>
+          <a:bodyPr/>
+          <a:p/>
+        </p:txBody>
       </p:sp>
       <p:sp>
         <p:nvSpPr>
@@ -7530,6 +7610,10 @@
           </a:solidFill>
           <a:ln/>
         </p:spPr>
+        <p:txBody>
+          <a:bodyPr/>
+          <a:p/>
+        </p:txBody>
       </p:sp>
       <p:sp>
         <p:nvSpPr>
@@ -7786,6 +7870,10 @@
             </a:outerShdw>
           </a:effectLst>
         </p:spPr>
+        <p:txBody>
+          <a:bodyPr/>
+          <a:p/>
+        </p:txBody>
       </p:sp>
       <p:sp>
         <p:nvSpPr>
@@ -7960,6 +8048,10 @@
             </a:outerShdw>
           </a:effectLst>
         </p:spPr>
+        <p:txBody>
+          <a:bodyPr/>
+          <a:p/>
+        </p:txBody>
       </p:sp>
       <p:sp>
         <p:nvSpPr>
@@ -8350,6 +8442,10 @@
             </a:outerShdw>
           </a:effectLst>
         </p:spPr>
+        <p:txBody>
+          <a:bodyPr/>
+          <a:p/>
+        </p:txBody>
       </p:sp>
       <p:sp>
         <p:nvSpPr>
@@ -8524,6 +8620,10 @@
             </a:outerShdw>
           </a:effectLst>
         </p:spPr>
+        <p:txBody>
+          <a:bodyPr/>
+          <a:p/>
+        </p:txBody>
       </p:sp>
       <p:sp>
         <p:nvSpPr>
@@ -8893,6 +8993,10 @@
             </a:outerShdw>
           </a:effectLst>
         </p:spPr>
+        <p:txBody>
+          <a:bodyPr/>
+          <a:p/>
+        </p:txBody>
       </p:sp>
       <p:sp>
         <p:nvSpPr>
@@ -9067,6 +9171,10 @@
             </a:outerShdw>
           </a:effectLst>
         </p:spPr>
+        <p:txBody>
+          <a:bodyPr/>
+          <a:p/>
+        </p:txBody>
       </p:sp>
       <p:sp>
         <p:nvSpPr>
@@ -9478,6 +9586,10 @@
             </a:outerShdw>
           </a:effectLst>
         </p:spPr>
+        <p:txBody>
+          <a:bodyPr/>
+          <a:p/>
+        </p:txBody>
       </p:sp>
       <p:sp>
         <p:nvSpPr>
@@ -9652,6 +9764,10 @@
             </a:outerShdw>
           </a:effectLst>
         </p:spPr>
+        <p:txBody>
+          <a:bodyPr/>
+          <a:p/>
+        </p:txBody>
       </p:sp>
       <p:sp>
         <p:nvSpPr>
@@ -10042,6 +10158,10 @@
             </a:outerShdw>
           </a:effectLst>
         </p:spPr>
+        <p:txBody>
+          <a:bodyPr/>
+          <a:p/>
+        </p:txBody>
       </p:sp>
       <p:sp>
         <p:nvSpPr>
@@ -10157,6 +10277,10 @@
             </a:outerShdw>
           </a:effectLst>
         </p:spPr>
+        <p:txBody>
+          <a:bodyPr/>
+          <a:p/>
+        </p:txBody>
       </p:sp>
       <p:sp>
         <p:nvSpPr>
@@ -10547,6 +10671,10 @@
             </a:outerShdw>
           </a:effectLst>
         </p:spPr>
+        <p:txBody>
+          <a:bodyPr/>
+          <a:p/>
+        </p:txBody>
       </p:sp>
       <p:sp>
         <p:nvSpPr>
@@ -10654,6 +10782,10 @@
             </a:outerShdw>
           </a:effectLst>
         </p:spPr>
+        <p:txBody>
+          <a:bodyPr/>
+          <a:p/>
+        </p:txBody>
       </p:sp>
       <p:sp>
         <p:nvSpPr>
@@ -10761,6 +10893,10 @@
             </a:outerShdw>
           </a:effectLst>
         </p:spPr>
+        <p:txBody>
+          <a:bodyPr/>
+          <a:p/>
+        </p:txBody>
       </p:sp>
       <p:sp>
         <p:nvSpPr>
@@ -10868,6 +11004,10 @@
             </a:outerShdw>
           </a:effectLst>
         </p:spPr>
+        <p:txBody>
+          <a:bodyPr/>
+          <a:p/>
+        </p:txBody>
       </p:sp>
       <p:sp>
         <p:nvSpPr>
@@ -11113,6 +11253,10 @@
           </a:solidFill>
           <a:ln/>
         </p:spPr>
+        <p:txBody>
+          <a:bodyPr/>
+          <a:p/>
+        </p:txBody>
       </p:sp>
       <p:sp>
         <p:nvSpPr>
@@ -11135,6 +11279,10 @@
           </a:solidFill>
           <a:ln/>
         </p:spPr>
+        <p:txBody>
+          <a:bodyPr/>
+          <a:p/>
+        </p:txBody>
       </p:sp>
       <p:sp>
         <p:nvSpPr>
@@ -12228,6 +12376,10 @@
             </a:outerShdw>
           </a:effectLst>
         </p:spPr>
+        <p:txBody>
+          <a:bodyPr/>
+          <a:p/>
+        </p:txBody>
       </p:sp>
       <p:sp>
         <p:nvSpPr>
@@ -12402,6 +12554,10 @@
             </a:outerShdw>
           </a:effectLst>
         </p:spPr>
+        <p:txBody>
+          <a:bodyPr/>
+          <a:p/>
+        </p:txBody>
       </p:sp>
       <p:sp>
         <p:nvSpPr>
@@ -12792,6 +12948,10 @@
             </a:outerShdw>
           </a:effectLst>
         </p:spPr>
+        <p:txBody>
+          <a:bodyPr/>
+          <a:p/>
+        </p:txBody>
       </p:sp>
       <p:sp>
         <p:nvSpPr>
@@ -12966,6 +13126,10 @@
             </a:outerShdw>
           </a:effectLst>
         </p:spPr>
+        <p:txBody>
+          <a:bodyPr/>
+          <a:p/>
+        </p:txBody>
       </p:sp>
       <p:sp>
         <p:nvSpPr>
@@ -13271,6 +13435,10 @@
           </a:solidFill>
           <a:ln/>
         </p:spPr>
+        <p:txBody>
+          <a:bodyPr/>
+          <a:p/>
+        </p:txBody>
       </p:sp>
       <p:sp>
         <p:nvSpPr>
@@ -13293,6 +13461,10 @@
           </a:solidFill>
           <a:ln/>
         </p:spPr>
+        <p:txBody>
+          <a:bodyPr/>
+          <a:p/>
+        </p:txBody>
       </p:sp>
       <p:sp>
         <p:nvSpPr>
@@ -13549,6 +13721,10 @@
             </a:outerShdw>
           </a:effectLst>
         </p:spPr>
+        <p:txBody>
+          <a:bodyPr/>
+          <a:p/>
+        </p:txBody>
       </p:sp>
       <p:sp>
         <p:nvSpPr>
@@ -13723,6 +13899,10 @@
             </a:outerShdw>
           </a:effectLst>
         </p:spPr>
+        <p:txBody>
+          <a:bodyPr/>
+          <a:p/>
+        </p:txBody>
       </p:sp>
       <p:sp>
         <p:nvSpPr>
@@ -14113,6 +14293,10 @@
             </a:outerShdw>
           </a:effectLst>
         </p:spPr>
+        <p:txBody>
+          <a:bodyPr/>
+          <a:p/>
+        </p:txBody>
       </p:sp>
       <p:sp>
         <p:nvSpPr>
@@ -14287,6 +14471,10 @@
             </a:outerShdw>
           </a:effectLst>
         </p:spPr>
+        <p:txBody>
+          <a:bodyPr/>
+          <a:p/>
+        </p:txBody>
       </p:sp>
       <p:sp>
         <p:nvSpPr>
@@ -14677,6 +14865,10 @@
             </a:outerShdw>
           </a:effectLst>
         </p:spPr>
+        <p:txBody>
+          <a:bodyPr/>
+          <a:p/>
+        </p:txBody>
       </p:sp>
       <p:sp>
         <p:nvSpPr>
@@ -14851,6 +15043,10 @@
             </a:outerShdw>
           </a:effectLst>
         </p:spPr>
+        <p:txBody>
+          <a:bodyPr/>
+          <a:p/>
+        </p:txBody>
       </p:sp>
       <p:sp>
         <p:nvSpPr>
@@ -18141,6 +18337,10 @@
           </a:solidFill>
           <a:ln/>
         </p:spPr>
+        <p:txBody>
+          <a:bodyPr/>
+          <a:p/>
+        </p:txBody>
       </p:sp>
       <p:sp>
         <p:nvSpPr>
@@ -18163,6 +18363,10 @@
           </a:solidFill>
           <a:ln/>
         </p:spPr>
+        <p:txBody>
+          <a:bodyPr/>
+          <a:p/>
+        </p:txBody>
       </p:sp>
       <p:sp>
         <p:nvSpPr>
@@ -18419,6 +18623,10 @@
             </a:outerShdw>
           </a:effectLst>
         </p:spPr>
+        <p:txBody>
+          <a:bodyPr/>
+          <a:p/>
+        </p:txBody>
       </p:sp>
       <p:sp>
         <p:nvSpPr>
@@ -18446,6 +18654,10 @@
             </a:outerShdw>
           </a:effectLst>
         </p:spPr>
+        <p:txBody>
+          <a:bodyPr/>
+          <a:p/>
+        </p:txBody>
       </p:sp>
       <p:sp>
         <p:nvSpPr>
@@ -18553,6 +18765,10 @@
             </a:outerShdw>
           </a:effectLst>
         </p:spPr>
+        <p:txBody>
+          <a:bodyPr/>
+          <a:p/>
+        </p:txBody>
       </p:sp>
       <p:sp>
         <p:nvSpPr>
@@ -18580,6 +18796,10 @@
             </a:outerShdw>
           </a:effectLst>
         </p:spPr>
+        <p:txBody>
+          <a:bodyPr/>
+          <a:p/>
+        </p:txBody>
       </p:sp>
       <p:sp>
         <p:nvSpPr>
@@ -18687,6 +18907,10 @@
             </a:outerShdw>
           </a:effectLst>
         </p:spPr>
+        <p:txBody>
+          <a:bodyPr/>
+          <a:p/>
+        </p:txBody>
       </p:sp>
       <p:sp>
         <p:nvSpPr>
@@ -18714,6 +18938,10 @@
             </a:outerShdw>
           </a:effectLst>
         </p:spPr>
+        <p:txBody>
+          <a:bodyPr/>
+          <a:p/>
+        </p:txBody>
       </p:sp>
       <p:sp>
         <p:nvSpPr>
@@ -18821,6 +19049,10 @@
             </a:outerShdw>
           </a:effectLst>
         </p:spPr>
+        <p:txBody>
+          <a:bodyPr/>
+          <a:p/>
+        </p:txBody>
       </p:sp>
       <p:sp>
         <p:nvSpPr>
@@ -18848,6 +19080,10 @@
             </a:outerShdw>
           </a:effectLst>
         </p:spPr>
+        <p:txBody>
+          <a:bodyPr/>
+          <a:p/>
+        </p:txBody>
       </p:sp>
       <p:sp>
         <p:nvSpPr>
@@ -18955,6 +19191,10 @@
             </a:outerShdw>
           </a:effectLst>
         </p:spPr>
+        <p:txBody>
+          <a:bodyPr/>
+          <a:p/>
+        </p:txBody>
       </p:sp>
       <p:sp>
         <p:nvSpPr>
@@ -18982,6 +19222,10 @@
             </a:outerShdw>
           </a:effectLst>
         </p:spPr>
+        <p:txBody>
+          <a:bodyPr/>
+          <a:p/>
+        </p:txBody>
       </p:sp>
       <p:sp>
         <p:nvSpPr>
@@ -19089,6 +19333,10 @@
             </a:outerShdw>
           </a:effectLst>
         </p:spPr>
+        <p:txBody>
+          <a:bodyPr/>
+          <a:p/>
+        </p:txBody>
       </p:sp>
       <p:sp>
         <p:nvSpPr>
@@ -19116,6 +19364,10 @@
             </a:outerShdw>
           </a:effectLst>
         </p:spPr>
+        <p:txBody>
+          <a:bodyPr/>
+          <a:p/>
+        </p:txBody>
       </p:sp>
       <p:sp>
         <p:nvSpPr>
@@ -19439,6 +19691,10 @@
             </a:outerShdw>
           </a:effectLst>
         </p:spPr>
+        <p:txBody>
+          <a:bodyPr/>
+          <a:p/>
+        </p:txBody>
       </p:sp>
       <p:sp>
         <p:nvSpPr>
@@ -19613,6 +19869,10 @@
             </a:outerShdw>
           </a:effectLst>
         </p:spPr>
+        <p:txBody>
+          <a:bodyPr/>
+          <a:p/>
+        </p:txBody>
       </p:sp>
       <p:sp>
         <p:nvSpPr>
@@ -20003,6 +20263,10 @@
             </a:outerShdw>
           </a:effectLst>
         </p:spPr>
+        <p:txBody>
+          <a:bodyPr/>
+          <a:p/>
+        </p:txBody>
       </p:sp>
       <p:sp>
         <p:nvSpPr>
@@ -20182,6 +20446,10 @@
             </a:outerShdw>
           </a:effectLst>
         </p:spPr>
+        <p:txBody>
+          <a:bodyPr/>
+          <a:p/>
+        </p:txBody>
       </p:sp>
       <p:sp>
         <p:nvSpPr>
@@ -20572,6 +20840,10 @@
             </a:outerShdw>
           </a:effectLst>
         </p:spPr>
+        <p:txBody>
+          <a:bodyPr/>
+          <a:p/>
+        </p:txBody>
       </p:sp>
       <p:sp>
         <p:nvSpPr>
@@ -20746,6 +21018,10 @@
             </a:outerShdw>
           </a:effectLst>
         </p:spPr>
+        <p:txBody>
+          <a:bodyPr/>
+          <a:p/>
+        </p:txBody>
       </p:sp>
       <p:sp>
         <p:nvSpPr>
@@ -21141,6 +21417,10 @@
             </a:outerShdw>
           </a:effectLst>
         </p:spPr>
+        <p:txBody>
+          <a:bodyPr/>
+          <a:p/>
+        </p:txBody>
       </p:sp>
       <p:sp>
         <p:nvSpPr>
@@ -21204,6 +21484,10 @@
             <a:tailEnd type="triangle"/>
           </a:ln>
         </p:spPr>
+        <p:txBody>
+          <a:bodyPr/>
+          <a:p/>
+        </p:txBody>
       </p:sp>
       <p:sp>
         <p:nvSpPr>
@@ -21227,6 +21511,10 @@
             <a:prstDash val="solid"/>
           </a:ln>
         </p:spPr>
+        <p:txBody>
+          <a:bodyPr/>
+          <a:p/>
+        </p:txBody>
       </p:sp>
       <p:sp>
         <p:nvSpPr>
@@ -21251,6 +21539,10 @@
             <a:tailEnd type="triangle"/>
           </a:ln>
         </p:spPr>
+        <p:txBody>
+          <a:bodyPr/>
+          <a:p/>
+        </p:txBody>
       </p:sp>
       <p:sp>
         <p:nvSpPr>
@@ -21285,6 +21577,10 @@
             </a:outerShdw>
           </a:effectLst>
         </p:spPr>
+        <p:txBody>
+          <a:bodyPr/>
+          <a:p/>
+        </p:txBody>
       </p:sp>
       <p:sp>
         <p:nvSpPr>
@@ -21353,6 +21649,10 @@
             </a:outerShdw>
           </a:effectLst>
         </p:spPr>
+        <p:txBody>
+          <a:bodyPr/>
+          <a:p/>
+        </p:txBody>
       </p:sp>
       <p:sp>
         <p:nvSpPr>
@@ -21419,6 +21719,10 @@
             <a:tailEnd type="triangle"/>
           </a:ln>
         </p:spPr>
+        <p:txBody>
+          <a:bodyPr/>
+          <a:p/>
+        </p:txBody>
       </p:sp>
       <p:sp>
         <p:nvSpPr>
@@ -21453,6 +21757,10 @@
             </a:outerShdw>
           </a:effectLst>
         </p:spPr>
+        <p:txBody>
+          <a:bodyPr/>
+          <a:p/>
+        </p:txBody>
       </p:sp>
       <p:sp>
         <p:nvSpPr>
@@ -21521,6 +21829,10 @@
             </a:outerShdw>
           </a:effectLst>
         </p:spPr>
+        <p:txBody>
+          <a:bodyPr/>
+          <a:p/>
+        </p:txBody>
       </p:sp>
       <p:sp>
         <p:nvSpPr>
@@ -21587,6 +21899,10 @@
             <a:tailEnd type="triangle"/>
           </a:ln>
         </p:spPr>
+        <p:txBody>
+          <a:bodyPr/>
+          <a:p/>
+        </p:txBody>
       </p:sp>
       <p:sp>
         <p:nvSpPr>
@@ -21621,6 +21937,10 @@
             </a:outerShdw>
           </a:effectLst>
         </p:spPr>
+        <p:txBody>
+          <a:bodyPr/>
+          <a:p/>
+        </p:txBody>
       </p:sp>
       <p:sp>
         <p:nvSpPr>
@@ -21689,6 +22009,10 @@
             </a:outerShdw>
           </a:effectLst>
         </p:spPr>
+        <p:txBody>
+          <a:bodyPr/>
+          <a:p/>
+        </p:txBody>
       </p:sp>
       <p:sp>
         <p:nvSpPr>
@@ -21930,6 +22254,10 @@
           </a:solidFill>
           <a:ln/>
         </p:spPr>
+        <p:txBody>
+          <a:bodyPr/>
+          <a:p/>
+        </p:txBody>
       </p:sp>
       <p:sp>
         <p:nvSpPr>
@@ -21952,6 +22280,10 @@
           </a:solidFill>
           <a:ln/>
         </p:spPr>
+        <p:txBody>
+          <a:bodyPr/>
+          <a:p/>
+        </p:txBody>
       </p:sp>
       <p:sp>
         <p:nvSpPr>
@@ -22208,6 +22540,10 @@
             </a:outerShdw>
           </a:effectLst>
         </p:spPr>
+        <p:txBody>
+          <a:bodyPr/>
+          <a:p/>
+        </p:txBody>
       </p:sp>
       <p:sp>
         <p:nvSpPr>
@@ -22318,6 +22654,10 @@
             </a:outerShdw>
           </a:effectLst>
         </p:spPr>
+        <p:txBody>
+          <a:bodyPr/>
+          <a:p/>
+        </p:txBody>
       </p:sp>
       <p:sp>
         <p:nvSpPr>
@@ -22747,6 +23087,10 @@
             </a:outerShdw>
           </a:effectLst>
         </p:spPr>
+        <p:txBody>
+          <a:bodyPr/>
+          <a:p/>
+        </p:txBody>
       </p:sp>
       <p:sp>
         <p:nvSpPr>
@@ -23073,6 +23417,10 @@
             </a:outerShdw>
           </a:effectLst>
         </p:spPr>
+        <p:txBody>
+          <a:bodyPr/>
+          <a:p/>
+        </p:txBody>
       </p:sp>
       <p:sp>
         <p:nvSpPr>
@@ -23183,6 +23531,10 @@
             </a:outerShdw>
           </a:effectLst>
         </p:spPr>
+        <p:txBody>
+          <a:bodyPr/>
+          <a:p/>
+        </p:txBody>
       </p:sp>
       <p:sp>
         <p:nvSpPr>
@@ -23612,6 +23964,10 @@
             </a:outerShdw>
           </a:effectLst>
         </p:spPr>
+        <p:txBody>
+          <a:bodyPr/>
+          <a:p/>
+        </p:txBody>
       </p:sp>
       <p:sp>
         <p:nvSpPr>
@@ -23938,6 +24294,10 @@
             </a:outerShdw>
           </a:effectLst>
         </p:spPr>
+        <p:txBody>
+          <a:bodyPr/>
+          <a:p/>
+        </p:txBody>
       </p:sp>
       <p:sp>
         <p:nvSpPr>
@@ -24048,6 +24408,10 @@
             </a:outerShdw>
           </a:effectLst>
         </p:spPr>
+        <p:txBody>
+          <a:bodyPr/>
+          <a:p/>
+        </p:txBody>
       </p:sp>
       <p:sp>
         <p:nvSpPr>
@@ -24371,6 +24735,10 @@
             </a:outerShdw>
           </a:effectLst>
         </p:spPr>
+        <p:txBody>
+          <a:bodyPr/>
+          <a:p/>
+        </p:txBody>
       </p:sp>
       <p:sp>
         <p:nvSpPr>
@@ -24398,6 +24766,10 @@
             </a:outerShdw>
           </a:effectLst>
         </p:spPr>
+        <p:txBody>
+          <a:bodyPr/>
+          <a:p/>
+        </p:txBody>
       </p:sp>
       <p:sp>
         <p:nvSpPr>
@@ -24512,6 +24884,10 @@
           </a:solidFill>
           <a:ln/>
         </p:spPr>
+        <p:txBody>
+          <a:bodyPr/>
+          <a:p/>
+        </p:txBody>
       </p:sp>
       <p:sp>
         <p:nvSpPr>
@@ -24539,6 +24915,10 @@
             </a:outerShdw>
           </a:effectLst>
         </p:spPr>
+        <p:txBody>
+          <a:bodyPr/>
+          <a:p/>
+        </p:txBody>
       </p:sp>
       <p:sp>
         <p:nvSpPr>
@@ -24660,6 +25040,10 @@
             </a:outerShdw>
           </a:effectLst>
         </p:spPr>
+        <p:txBody>
+          <a:bodyPr/>
+          <a:p/>
+        </p:txBody>
       </p:sp>
       <p:sp>
         <p:nvSpPr>
@@ -24687,6 +25071,10 @@
             </a:outerShdw>
           </a:effectLst>
         </p:spPr>
+        <p:txBody>
+          <a:bodyPr/>
+          <a:p/>
+        </p:txBody>
       </p:sp>
       <p:sp>
         <p:nvSpPr>
@@ -24801,6 +25189,10 @@
           </a:solidFill>
           <a:ln/>
         </p:spPr>
+        <p:txBody>
+          <a:bodyPr/>
+          <a:p/>
+        </p:txBody>
       </p:sp>
       <p:sp>
         <p:nvSpPr>
@@ -24828,6 +25220,10 @@
             </a:outerShdw>
           </a:effectLst>
         </p:spPr>
+        <p:txBody>
+          <a:bodyPr/>
+          <a:p/>
+        </p:txBody>
       </p:sp>
       <p:sp>
         <p:nvSpPr>
@@ -24949,6 +25345,10 @@
             </a:outerShdw>
           </a:effectLst>
         </p:spPr>
+        <p:txBody>
+          <a:bodyPr/>
+          <a:p/>
+        </p:txBody>
       </p:sp>
       <p:sp>
         <p:nvSpPr>
@@ -24976,6 +25376,10 @@
             </a:outerShdw>
           </a:effectLst>
         </p:spPr>
+        <p:txBody>
+          <a:bodyPr/>
+          <a:p/>
+        </p:txBody>
       </p:sp>
       <p:sp>
         <p:nvSpPr>
@@ -25090,6 +25494,10 @@
           </a:solidFill>
           <a:ln/>
         </p:spPr>
+        <p:txBody>
+          <a:bodyPr/>
+          <a:p/>
+        </p:txBody>
       </p:sp>
       <p:sp>
         <p:nvSpPr>
@@ -25117,6 +25525,10 @@
             </a:outerShdw>
           </a:effectLst>
         </p:spPr>
+        <p:txBody>
+          <a:bodyPr/>
+          <a:p/>
+        </p:txBody>
       </p:sp>
       <p:sp>
         <p:nvSpPr>
@@ -25560,6 +25972,10 @@
             </a:outerShdw>
           </a:effectLst>
         </p:spPr>
+        <p:txBody>
+          <a:bodyPr/>
+          <a:p/>
+        </p:txBody>
       </p:sp>
       <p:sp>
         <p:nvSpPr>
@@ -25801,6 +26217,10 @@
           </a:solidFill>
           <a:ln/>
         </p:spPr>
+        <p:txBody>
+          <a:bodyPr/>
+          <a:p/>
+        </p:txBody>
       </p:sp>
       <p:sp>
         <p:nvSpPr>
@@ -25823,6 +26243,10 @@
           </a:solidFill>
           <a:ln/>
         </p:spPr>
+        <p:txBody>
+          <a:bodyPr/>
+          <a:p/>
+        </p:txBody>
       </p:sp>
       <p:sp>
         <p:nvSpPr>
@@ -26161,9 +26585,9 @@
               <a:buNone/>
             </a:pPr>
             <a:r>
-              <a:rPr lang="en-US" sz="1350" b="1" dirty="0">
-                <a:solidFill>
-                  <a:srgbClr val="7A0E3C"/>
+              <a:rPr lang="en-US" sz="1350" b="0" dirty="0">
+                <a:solidFill>
+                  <a:srgbClr val="33444F"/>
                 </a:solidFill>
                 <a:latin typeface="Calibri" pitchFamily="34" charset="0"/>
                 <a:ea typeface="Calibri" pitchFamily="34" charset="-122"/>
@@ -26212,130 +26636,6 @@
               <a:t>E. Anti-Lea</a:t>
             </a:r>
             <a:endParaRPr lang="en-US" sz="1350" dirty="0"/>
-          </a:p>
-        </p:txBody>
-      </p:sp>
-      <p:sp>
-        <p:nvSpPr>
-          <p:cNvPr id="6" name="Shape 4"/>
-          <p:cNvSpPr/>
-          <p:nvPr/>
-        </p:nvSpPr>
-        <p:spPr>
-          <a:xfrm>
-            <a:off x="7201632" y="2395728"/>
-            <a:ext cx="4423136" cy="3246120"/>
-          </a:xfrm>
-          <a:prstGeom prst="roundRect">
-            <a:avLst>
-              <a:gd name="adj" fmla="val 2535"/>
-            </a:avLst>
-          </a:prstGeom>
-          <a:solidFill>
-            <a:srgbClr val="F8E7EF"/>
-          </a:solidFill>
-          <a:ln/>
-          <a:effectLst>
-            <a:outerShdw sx="100000" sy="100000" kx="0" ky="0" algn="bl" rotWithShape="0" blurRad="88900" dist="25400" dir="5400000">
-              <a:srgbClr val="22303C">
-                <a:alpha val="12000"/>
-              </a:srgbClr>
-            </a:outerShdw>
-          </a:effectLst>
-        </p:spPr>
-      </p:sp>
-      <p:sp>
-        <p:nvSpPr>
-          <p:cNvPr id="7" name="Text 5"/>
-          <p:cNvSpPr/>
-          <p:nvPr/>
-        </p:nvSpPr>
-        <p:spPr>
-          <a:xfrm>
-            <a:off x="7439376" y="2578608"/>
-            <a:ext cx="3965936" cy="457200"/>
-          </a:xfrm>
-          <a:prstGeom prst="rect">
-            <a:avLst/>
-          </a:prstGeom>
-          <a:noFill/>
-          <a:ln/>
-        </p:spPr>
-        <p:txBody>
-          <a:bodyPr wrap="square" lIns="0" tIns="0" rIns="0" bIns="0" rtlCol="0" anchor="ctr"/>
-          <a:lstStyle/>
-          <a:p>
-            <a:pPr indent="0" marL="0">
-              <a:buNone/>
-            </a:pPr>
-            <a:r>
-              <a:rPr lang="en-US" sz="1500" b="1" dirty="0">
-                <a:solidFill>
-                  <a:srgbClr val="AD1457"/>
-                </a:solidFill>
-                <a:latin typeface="Calibri" pitchFamily="34" charset="0"/>
-                <a:ea typeface="Calibri" pitchFamily="34" charset="-122"/>
-                <a:cs typeface="Calibri" pitchFamily="34" charset="-120"/>
-              </a:rPr>
-              <a:t>ANSWER  </a:t>
-            </a:r>
-            <a:pPr indent="0" marL="0">
-              <a:buNone/>
-            </a:pPr>
-            <a:r>
-              <a:rPr lang="en-US" sz="1500" b="1" dirty="0">
-                <a:solidFill>
-                  <a:srgbClr val="1B2A38"/>
-                </a:solidFill>
-                <a:latin typeface="Calibri" pitchFamily="34" charset="0"/>
-                <a:ea typeface="Calibri" pitchFamily="34" charset="-122"/>
-                <a:cs typeface="Calibri" pitchFamily="34" charset="-120"/>
-              </a:rPr>
-              <a:t>C — Anti-Fya</a:t>
-            </a:r>
-            <a:endParaRPr lang="en-US" sz="1500" dirty="0"/>
-          </a:p>
-        </p:txBody>
-      </p:sp>
-      <p:sp>
-        <p:nvSpPr>
-          <p:cNvPr id="8" name="Text 6"/>
-          <p:cNvSpPr/>
-          <p:nvPr/>
-        </p:nvSpPr>
-        <p:spPr>
-          <a:xfrm>
-            <a:off x="7439376" y="3127248"/>
-            <a:ext cx="3947648" cy="2377440"/>
-          </a:xfrm>
-          <a:prstGeom prst="rect">
-            <a:avLst/>
-          </a:prstGeom>
-          <a:noFill/>
-          <a:ln/>
-        </p:spPr>
-        <p:txBody>
-          <a:bodyPr wrap="square" lIns="0" tIns="0" rIns="0" bIns="0" rtlCol="0" anchor="t"/>
-          <a:lstStyle/>
-          <a:p>
-            <a:pPr algn="l" indent="0" marL="0">
-              <a:lnSpc>
-                <a:spcPct val="108000"/>
-              </a:lnSpc>
-              <a:buNone/>
-            </a:pPr>
-            <a:r>
-              <a:rPr lang="en-US" sz="1250" dirty="0">
-                <a:solidFill>
-                  <a:srgbClr val="33444F"/>
-                </a:solidFill>
-                <a:latin typeface="Calibri" pitchFamily="34" charset="0"/>
-                <a:ea typeface="Calibri" pitchFamily="34" charset="-122"/>
-                <a:cs typeface="Calibri" pitchFamily="34" charset="-120"/>
-              </a:rPr>
-              <a:t>Ficin/papain destroy Duffy (and MNS) antigens, abolishing their reactivity, while enhancing Rh, Kidd, Lewis, P1, and I. Kell is enzyme-resistant. So loss on ficin points to Duffy.</a:t>
-            </a:r>
-            <a:endParaRPr lang="en-US" sz="1250" dirty="0"/>
           </a:p>
         </p:txBody>
       </p:sp>
@@ -26645,9 +26945,9 @@
               <a:buNone/>
             </a:pPr>
             <a:r>
-              <a:rPr lang="en-US" sz="1350" b="1" dirty="0">
-                <a:solidFill>
-                  <a:srgbClr val="7A0E3C"/>
+              <a:rPr lang="en-US" sz="1350" b="0" dirty="0">
+                <a:solidFill>
+                  <a:srgbClr val="33444F"/>
                 </a:solidFill>
                 <a:latin typeface="Calibri" pitchFamily="34" charset="0"/>
                 <a:ea typeface="Calibri" pitchFamily="34" charset="-122"/>
@@ -26716,130 +27016,6 @@
               <a:t>E. Rouleaux; saline replacement</a:t>
             </a:r>
             <a:endParaRPr lang="en-US" sz="1350" dirty="0"/>
-          </a:p>
-        </p:txBody>
-      </p:sp>
-      <p:sp>
-        <p:nvSpPr>
-          <p:cNvPr id="6" name="Shape 4"/>
-          <p:cNvSpPr/>
-          <p:nvPr/>
-        </p:nvSpPr>
-        <p:spPr>
-          <a:xfrm>
-            <a:off x="7201632" y="2395728"/>
-            <a:ext cx="4423136" cy="3246120"/>
-          </a:xfrm>
-          <a:prstGeom prst="roundRect">
-            <a:avLst>
-              <a:gd name="adj" fmla="val 2535"/>
-            </a:avLst>
-          </a:prstGeom>
-          <a:solidFill>
-            <a:srgbClr val="F8E7EF"/>
-          </a:solidFill>
-          <a:ln/>
-          <a:effectLst>
-            <a:outerShdw sx="100000" sy="100000" kx="0" ky="0" algn="bl" rotWithShape="0" blurRad="88900" dist="25400" dir="5400000">
-              <a:srgbClr val="22303C">
-                <a:alpha val="12000"/>
-              </a:srgbClr>
-            </a:outerShdw>
-          </a:effectLst>
-        </p:spPr>
-      </p:sp>
-      <p:sp>
-        <p:nvSpPr>
-          <p:cNvPr id="7" name="Text 5"/>
-          <p:cNvSpPr/>
-          <p:nvPr/>
-        </p:nvSpPr>
-        <p:spPr>
-          <a:xfrm>
-            <a:off x="7439376" y="2578608"/>
-            <a:ext cx="3965936" cy="457200"/>
-          </a:xfrm>
-          <a:prstGeom prst="rect">
-            <a:avLst/>
-          </a:prstGeom>
-          <a:noFill/>
-          <a:ln/>
-        </p:spPr>
-        <p:txBody>
-          <a:bodyPr wrap="square" lIns="0" tIns="0" rIns="0" bIns="0" rtlCol="0" anchor="ctr"/>
-          <a:lstStyle/>
-          <a:p>
-            <a:pPr indent="0" marL="0">
-              <a:buNone/>
-            </a:pPr>
-            <a:r>
-              <a:rPr lang="en-US" sz="1500" b="1" dirty="0">
-                <a:solidFill>
-                  <a:srgbClr val="AD1457"/>
-                </a:solidFill>
-                <a:latin typeface="Calibri" pitchFamily="34" charset="0"/>
-                <a:ea typeface="Calibri" pitchFamily="34" charset="-122"/>
-                <a:cs typeface="Calibri" pitchFamily="34" charset="-120"/>
-              </a:rPr>
-              <a:t>ANSWER  </a:t>
-            </a:r>
-            <a:pPr indent="0" marL="0">
-              <a:buNone/>
-            </a:pPr>
-            <a:r>
-              <a:rPr lang="en-US" sz="1500" b="1" dirty="0">
-                <a:solidFill>
-                  <a:srgbClr val="1B2A38"/>
-                </a:solidFill>
-                <a:latin typeface="Calibri" pitchFamily="34" charset="0"/>
-                <a:ea typeface="Calibri" pitchFamily="34" charset="-122"/>
-                <a:cs typeface="Calibri" pitchFamily="34" charset="-120"/>
-              </a:rPr>
-              <a:t>B — Dosage; rule out on homozygous cells</a:t>
-            </a:r>
-            <a:endParaRPr lang="en-US" sz="1500" dirty="0"/>
-          </a:p>
-        </p:txBody>
-      </p:sp>
-      <p:sp>
-        <p:nvSpPr>
-          <p:cNvPr id="8" name="Text 6"/>
-          <p:cNvSpPr/>
-          <p:nvPr/>
-        </p:nvSpPr>
-        <p:spPr>
-          <a:xfrm>
-            <a:off x="7439376" y="3127248"/>
-            <a:ext cx="3947648" cy="2377440"/>
-          </a:xfrm>
-          <a:prstGeom prst="rect">
-            <a:avLst/>
-          </a:prstGeom>
-          <a:noFill/>
-          <a:ln/>
-        </p:spPr>
-        <p:txBody>
-          <a:bodyPr wrap="square" lIns="0" tIns="0" rIns="0" bIns="0" rtlCol="0" anchor="t"/>
-          <a:lstStyle/>
-          <a:p>
-            <a:pPr algn="l" indent="0" marL="0">
-              <a:lnSpc>
-                <a:spcPct val="108000"/>
-              </a:lnSpc>
-              <a:buNone/>
-            </a:pPr>
-            <a:r>
-              <a:rPr lang="en-US" sz="1250" dirty="0">
-                <a:solidFill>
-                  <a:srgbClr val="33444F"/>
-                </a:solidFill>
-                <a:latin typeface="Calibri" pitchFamily="34" charset="0"/>
-                <a:ea typeface="Calibri" pitchFamily="34" charset="-122"/>
-                <a:cs typeface="Calibri" pitchFamily="34" charset="-120"/>
-              </a:rPr>
-              <a:t>Kidd shows dosage: Jk(a+b–) is double-dose Jka and reacts more strongly than single-dose Jk(a+b+). Antibodies to dosage systems (Kidd, Duffy, Rh, MNS) must be ruled out on homozygous cells.</a:t>
-            </a:r>
-            <a:endParaRPr lang="en-US" sz="1250" dirty="0"/>
           </a:p>
         </p:txBody>
       </p:sp>
@@ -27149,9 +27325,9 @@
               <a:buNone/>
             </a:pPr>
             <a:r>
-              <a:rPr lang="en-US" sz="1350" b="1" dirty="0">
-                <a:solidFill>
-                  <a:srgbClr val="7A0E3C"/>
+              <a:rPr lang="en-US" sz="1350" b="0" dirty="0">
+                <a:solidFill>
+                  <a:srgbClr val="33444F"/>
                 </a:solidFill>
                 <a:latin typeface="Calibri" pitchFamily="34" charset="0"/>
                 <a:ea typeface="Calibri" pitchFamily="34" charset="-122"/>
@@ -27220,130 +27396,6 @@
               <a:t>E. Anti-D</a:t>
             </a:r>
             <a:endParaRPr lang="en-US" sz="1350" dirty="0"/>
-          </a:p>
-        </p:txBody>
-      </p:sp>
-      <p:sp>
-        <p:nvSpPr>
-          <p:cNvPr id="6" name="Shape 4"/>
-          <p:cNvSpPr/>
-          <p:nvPr/>
-        </p:nvSpPr>
-        <p:spPr>
-          <a:xfrm>
-            <a:off x="7201632" y="2395728"/>
-            <a:ext cx="4423136" cy="3246120"/>
-          </a:xfrm>
-          <a:prstGeom prst="roundRect">
-            <a:avLst>
-              <a:gd name="adj" fmla="val 2535"/>
-            </a:avLst>
-          </a:prstGeom>
-          <a:solidFill>
-            <a:srgbClr val="F8E7EF"/>
-          </a:solidFill>
-          <a:ln/>
-          <a:effectLst>
-            <a:outerShdw sx="100000" sy="100000" kx="0" ky="0" algn="bl" rotWithShape="0" blurRad="88900" dist="25400" dir="5400000">
-              <a:srgbClr val="22303C">
-                <a:alpha val="12000"/>
-              </a:srgbClr>
-            </a:outerShdw>
-          </a:effectLst>
-        </p:spPr>
-      </p:sp>
-      <p:sp>
-        <p:nvSpPr>
-          <p:cNvPr id="7" name="Text 5"/>
-          <p:cNvSpPr/>
-          <p:nvPr/>
-        </p:nvSpPr>
-        <p:spPr>
-          <a:xfrm>
-            <a:off x="7439376" y="2578608"/>
-            <a:ext cx="3965936" cy="457200"/>
-          </a:xfrm>
-          <a:prstGeom prst="rect">
-            <a:avLst/>
-          </a:prstGeom>
-          <a:noFill/>
-          <a:ln/>
-        </p:spPr>
-        <p:txBody>
-          <a:bodyPr wrap="square" lIns="0" tIns="0" rIns="0" bIns="0" rtlCol="0" anchor="ctr"/>
-          <a:lstStyle/>
-          <a:p>
-            <a:pPr indent="0" marL="0">
-              <a:buNone/>
-            </a:pPr>
-            <a:r>
-              <a:rPr lang="en-US" sz="1500" b="1" dirty="0">
-                <a:solidFill>
-                  <a:srgbClr val="AD1457"/>
-                </a:solidFill>
-                <a:latin typeface="Calibri" pitchFamily="34" charset="0"/>
-                <a:ea typeface="Calibri" pitchFamily="34" charset="-122"/>
-                <a:cs typeface="Calibri" pitchFamily="34" charset="-120"/>
-              </a:rPr>
-              <a:t>ANSWER  </a:t>
-            </a:r>
-            <a:pPr indent="0" marL="0">
-              <a:buNone/>
-            </a:pPr>
-            <a:r>
-              <a:rPr lang="en-US" sz="1500" b="1" dirty="0">
-                <a:solidFill>
-                  <a:srgbClr val="1B2A38"/>
-                </a:solidFill>
-                <a:latin typeface="Calibri" pitchFamily="34" charset="0"/>
-                <a:ea typeface="Calibri" pitchFamily="34" charset="-122"/>
-                <a:cs typeface="Calibri" pitchFamily="34" charset="-120"/>
-              </a:rPr>
-              <a:t>B — Anti-I</a:t>
-            </a:r>
-            <a:endParaRPr lang="en-US" sz="1500" dirty="0"/>
-          </a:p>
-        </p:txBody>
-      </p:sp>
-      <p:sp>
-        <p:nvSpPr>
-          <p:cNvPr id="8" name="Text 6"/>
-          <p:cNvSpPr/>
-          <p:nvPr/>
-        </p:nvSpPr>
-        <p:spPr>
-          <a:xfrm>
-            <a:off x="7439376" y="3127248"/>
-            <a:ext cx="3947648" cy="2377440"/>
-          </a:xfrm>
-          <a:prstGeom prst="rect">
-            <a:avLst/>
-          </a:prstGeom>
-          <a:noFill/>
-          <a:ln/>
-        </p:spPr>
-        <p:txBody>
-          <a:bodyPr wrap="square" lIns="0" tIns="0" rIns="0" bIns="0" rtlCol="0" anchor="t"/>
-          <a:lstStyle/>
-          <a:p>
-            <a:pPr algn="l" indent="0" marL="0">
-              <a:lnSpc>
-                <a:spcPct val="108000"/>
-              </a:lnSpc>
-              <a:buNone/>
-            </a:pPr>
-            <a:r>
-              <a:rPr lang="en-US" sz="1250" dirty="0">
-                <a:solidFill>
-                  <a:srgbClr val="33444F"/>
-                </a:solidFill>
-                <a:latin typeface="Calibri" pitchFamily="34" charset="0"/>
-                <a:ea typeface="Calibri" pitchFamily="34" charset="-122"/>
-                <a:cs typeface="Calibri" pitchFamily="34" charset="-120"/>
-              </a:rPr>
-              <a:t>Cold agglutinin disease, classically post-Mycoplasma, is usually IgM anti-I that fixes complement; the IgM elutes in vivo leaving C3d on the DAT. Anti-P (biphasic) causes PCH.</a:t>
-            </a:r>
-            <a:endParaRPr lang="en-US" sz="1250" dirty="0"/>
           </a:p>
         </p:txBody>
       </p:sp>
@@ -27673,9 +27725,9 @@
               <a:buNone/>
             </a:pPr>
             <a:r>
-              <a:rPr lang="en-US" sz="1350" b="1" dirty="0">
-                <a:solidFill>
-                  <a:srgbClr val="7A0E3C"/>
+              <a:rPr lang="en-US" sz="1350" b="0" dirty="0">
+                <a:solidFill>
+                  <a:srgbClr val="33444F"/>
                 </a:solidFill>
                 <a:latin typeface="Calibri" pitchFamily="34" charset="0"/>
                 <a:ea typeface="Calibri" pitchFamily="34" charset="-122"/>
@@ -27724,130 +27776,6 @@
               <a:t>E. All panel cells must react</a:t>
             </a:r>
             <a:endParaRPr lang="en-US" sz="1350" dirty="0"/>
-          </a:p>
-        </p:txBody>
-      </p:sp>
-      <p:sp>
-        <p:nvSpPr>
-          <p:cNvPr id="6" name="Shape 4"/>
-          <p:cNvSpPr/>
-          <p:nvPr/>
-        </p:nvSpPr>
-        <p:spPr>
-          <a:xfrm>
-            <a:off x="7201632" y="2395728"/>
-            <a:ext cx="4423136" cy="3246120"/>
-          </a:xfrm>
-          <a:prstGeom prst="roundRect">
-            <a:avLst>
-              <a:gd name="adj" fmla="val 2535"/>
-            </a:avLst>
-          </a:prstGeom>
-          <a:solidFill>
-            <a:srgbClr val="F8E7EF"/>
-          </a:solidFill>
-          <a:ln/>
-          <a:effectLst>
-            <a:outerShdw sx="100000" sy="100000" kx="0" ky="0" algn="bl" rotWithShape="0" blurRad="88900" dist="25400" dir="5400000">
-              <a:srgbClr val="22303C">
-                <a:alpha val="12000"/>
-              </a:srgbClr>
-            </a:outerShdw>
-          </a:effectLst>
-        </p:spPr>
-      </p:sp>
-      <p:sp>
-        <p:nvSpPr>
-          <p:cNvPr id="7" name="Text 5"/>
-          <p:cNvSpPr/>
-          <p:nvPr/>
-        </p:nvSpPr>
-        <p:spPr>
-          <a:xfrm>
-            <a:off x="7439376" y="2578608"/>
-            <a:ext cx="3965936" cy="457200"/>
-          </a:xfrm>
-          <a:prstGeom prst="rect">
-            <a:avLst/>
-          </a:prstGeom>
-          <a:noFill/>
-          <a:ln/>
-        </p:spPr>
-        <p:txBody>
-          <a:bodyPr wrap="square" lIns="0" tIns="0" rIns="0" bIns="0" rtlCol="0" anchor="ctr"/>
-          <a:lstStyle/>
-          <a:p>
-            <a:pPr indent="0" marL="0">
-              <a:buNone/>
-            </a:pPr>
-            <a:r>
-              <a:rPr lang="en-US" sz="1500" b="1" dirty="0">
-                <a:solidFill>
-                  <a:srgbClr val="AD1457"/>
-                </a:solidFill>
-                <a:latin typeface="Calibri" pitchFamily="34" charset="0"/>
-                <a:ea typeface="Calibri" pitchFamily="34" charset="-122"/>
-                <a:cs typeface="Calibri" pitchFamily="34" charset="-120"/>
-              </a:rPr>
-              <a:t>ANSWER  </a:t>
-            </a:r>
-            <a:pPr indent="0" marL="0">
-              <a:buNone/>
-            </a:pPr>
-            <a:r>
-              <a:rPr lang="en-US" sz="1500" b="1" dirty="0">
-                <a:solidFill>
-                  <a:srgbClr val="1B2A38"/>
-                </a:solidFill>
-                <a:latin typeface="Calibri" pitchFamily="34" charset="0"/>
-                <a:ea typeface="Calibri" pitchFamily="34" charset="-122"/>
-                <a:cs typeface="Calibri" pitchFamily="34" charset="-120"/>
-              </a:rPr>
-              <a:t>C — 3 reactive antigen-positive and 3 non-reactive antigen-negative</a:t>
-            </a:r>
-            <a:endParaRPr lang="en-US" sz="1500" dirty="0"/>
-          </a:p>
-        </p:txBody>
-      </p:sp>
-      <p:sp>
-        <p:nvSpPr>
-          <p:cNvPr id="8" name="Text 6"/>
-          <p:cNvSpPr/>
-          <p:nvPr/>
-        </p:nvSpPr>
-        <p:spPr>
-          <a:xfrm>
-            <a:off x="7439376" y="3127248"/>
-            <a:ext cx="3947648" cy="2377440"/>
-          </a:xfrm>
-          <a:prstGeom prst="rect">
-            <a:avLst/>
-          </a:prstGeom>
-          <a:noFill/>
-          <a:ln/>
-        </p:spPr>
-        <p:txBody>
-          <a:bodyPr wrap="square" lIns="0" tIns="0" rIns="0" bIns="0" rtlCol="0" anchor="t"/>
-          <a:lstStyle/>
-          <a:p>
-            <a:pPr algn="l" indent="0" marL="0">
-              <a:lnSpc>
-                <a:spcPct val="108000"/>
-              </a:lnSpc>
-              <a:buNone/>
-            </a:pPr>
-            <a:r>
-              <a:rPr lang="en-US" sz="1250" dirty="0">
-                <a:solidFill>
-                  <a:srgbClr val="33444F"/>
-                </a:solidFill>
-                <a:latin typeface="Calibri" pitchFamily="34" charset="0"/>
-                <a:ea typeface="Calibri" pitchFamily="34" charset="-122"/>
-                <a:cs typeface="Calibri" pitchFamily="34" charset="-120"/>
-              </a:rPr>
-              <a:t>The rule of three gives a p value of approximately 0.05 — three antigen-positive cells that react and three antigen-negative cells that do not, confirming the pattern is not chance.</a:t>
-            </a:r>
-            <a:endParaRPr lang="en-US" sz="1250" dirty="0"/>
           </a:p>
         </p:txBody>
       </p:sp>
@@ -28088,6 +28016,10 @@
           </a:solidFill>
           <a:ln/>
         </p:spPr>
+        <p:txBody>
+          <a:bodyPr/>
+          <a:p/>
+        </p:txBody>
       </p:sp>
       <p:sp>
         <p:nvSpPr>
@@ -28115,6 +28047,10 @@
             </a:outerShdw>
           </a:effectLst>
         </p:spPr>
+        <p:txBody>
+          <a:bodyPr/>
+          <a:p/>
+        </p:txBody>
       </p:sp>
       <p:sp>
         <p:nvSpPr>
@@ -28215,6 +28151,10 @@
           </a:solidFill>
           <a:ln/>
         </p:spPr>
+        <p:txBody>
+          <a:bodyPr/>
+          <a:p/>
+        </p:txBody>
       </p:sp>
       <p:sp>
         <p:nvSpPr>
@@ -28242,6 +28182,10 @@
             </a:outerShdw>
           </a:effectLst>
         </p:spPr>
+        <p:txBody>
+          <a:bodyPr/>
+          <a:p/>
+        </p:txBody>
       </p:sp>
       <p:sp>
         <p:nvSpPr>
@@ -28342,6 +28286,10 @@
           </a:solidFill>
           <a:ln/>
         </p:spPr>
+        <p:txBody>
+          <a:bodyPr/>
+          <a:p/>
+        </p:txBody>
       </p:sp>
       <p:sp>
         <p:nvSpPr>
@@ -28369,6 +28317,10 @@
             </a:outerShdw>
           </a:effectLst>
         </p:spPr>
+        <p:txBody>
+          <a:bodyPr/>
+          <a:p/>
+        </p:txBody>
       </p:sp>
       <p:sp>
         <p:nvSpPr>
@@ -28469,6 +28421,10 @@
           </a:solidFill>
           <a:ln/>
         </p:spPr>
+        <p:txBody>
+          <a:bodyPr/>
+          <a:p/>
+        </p:txBody>
       </p:sp>
       <p:sp>
         <p:nvSpPr>
@@ -28496,6 +28452,10 @@
             </a:outerShdw>
           </a:effectLst>
         </p:spPr>
+        <p:txBody>
+          <a:bodyPr/>
+          <a:p/>
+        </p:txBody>
       </p:sp>
       <p:sp>
         <p:nvSpPr>
@@ -28596,6 +28556,10 @@
           </a:solidFill>
           <a:ln/>
         </p:spPr>
+        <p:txBody>
+          <a:bodyPr/>
+          <a:p/>
+        </p:txBody>
       </p:sp>
       <p:sp>
         <p:nvSpPr>
@@ -28623,6 +28587,10 @@
             </a:outerShdw>
           </a:effectLst>
         </p:spPr>
+        <p:txBody>
+          <a:bodyPr/>
+          <a:p/>
+        </p:txBody>
       </p:sp>
       <p:sp>
         <p:nvSpPr>
@@ -28723,6 +28691,10 @@
           </a:solidFill>
           <a:ln/>
         </p:spPr>
+        <p:txBody>
+          <a:bodyPr/>
+          <a:p/>
+        </p:txBody>
       </p:sp>
       <p:sp>
         <p:nvSpPr>
@@ -28750,6 +28722,10 @@
             </a:outerShdw>
           </a:effectLst>
         </p:spPr>
+        <p:txBody>
+          <a:bodyPr/>
+          <a:p/>
+        </p:txBody>
       </p:sp>
       <p:sp>
         <p:nvSpPr>
@@ -29233,6 +29209,994 @@
 </p:sld>
 </file>
 
+<file path=ppt/slides/slide48.xml><?xml version="1.0" encoding="utf-8"?>
+<p:sld xmlns:a="http://schemas.openxmlformats.org/drawingml/2006/main" xmlns:p="http://schemas.openxmlformats.org/presentationml/2006/main" xmlns:r="http://schemas.openxmlformats.org/officeDocument/2006/relationships">
+  <p:cSld>
+    <p:spTree>
+      <p:nvGrpSpPr>
+        <p:cNvPr id="1" name=""/>
+        <p:cNvGrpSpPr/>
+        <p:nvPr/>
+      </p:nvGrpSpPr>
+      <p:grpSpPr/>
+      <p:sp>
+        <p:nvSpPr>
+          <p:cNvPr id="2" name="Text 0"/>
+          <p:cNvSpPr/>
+          <p:nvPr/>
+        </p:nvSpPr>
+        <p:spPr>
+          <a:xfrm>
+            <a:off x="566928" y="329184"/>
+            <a:ext cx="10515600" cy="310896"/>
+          </a:xfrm>
+          <a:prstGeom prst="rect">
+            <a:avLst/>
+          </a:prstGeom>
+          <a:noFill/>
+          <a:ln/>
+        </p:spPr>
+        <p:txBody>
+          <a:bodyPr wrap="square" lIns="0" tIns="0" rIns="0" bIns="0" rtlCol="0" anchor="ctr"/>
+          <a:lstStyle/>
+          <a:p>
+            <a:pPr algn="l" indent="0" marL="0">
+              <a:buNone/>
+            </a:pPr>
+            <a:r>
+              <a:rPr lang="en-US" sz="1100" b="1" spc="150" kern="0" dirty="0">
+                <a:solidFill>
+                  <a:srgbClr val="AD1457"/>
+                </a:solidFill>
+                <a:latin typeface="Calibri" pitchFamily="34" charset="0"/>
+                <a:ea typeface="Calibri" pitchFamily="34" charset="-122"/>
+                <a:cs typeface="Calibri" pitchFamily="34" charset="-120"/>
+              </a:rPr>
+              <a:t>TRANSFUSION MEDICINE   ·   BOARD REVIEW  ·  Q4</a:t>
+            </a:r>
+            <a:endParaRPr lang="en-US" sz="1100" dirty="0"/>
+          </a:p>
+        </p:txBody>
+      </p:sp>
+      <p:sp>
+        <p:nvSpPr>
+          <p:cNvPr id="3" name="Text 1"/>
+          <p:cNvSpPr/>
+          <p:nvPr/>
+        </p:nvSpPr>
+        <p:spPr>
+          <a:xfrm>
+            <a:off x="566928" y="713232"/>
+            <a:ext cx="11064240" cy="749808"/>
+          </a:xfrm>
+          <a:prstGeom prst="rect">
+            <a:avLst/>
+          </a:prstGeom>
+          <a:noFill/>
+          <a:ln/>
+        </p:spPr>
+        <p:txBody>
+          <a:bodyPr wrap="square" lIns="0" tIns="0" rIns="0" bIns="0" rtlCol="0" anchor="ctr"/>
+          <a:lstStyle/>
+          <a:p>
+            <a:pPr algn="l" indent="0" marL="0">
+              <a:buNone/>
+            </a:pPr>
+            <a:r>
+              <a:rPr lang="en-US" sz="2600" b="1" dirty="0">
+                <a:solidFill>
+                  <a:srgbClr val="0E3A5F"/>
+                </a:solidFill>
+                <a:latin typeface="Calibri" pitchFamily="34" charset="0"/>
+                <a:ea typeface="Calibri" pitchFamily="34" charset="-122"/>
+                <a:cs typeface="Calibri" pitchFamily="34" charset="-120"/>
+              </a:rPr>
+              <a:t>Board-Style Review</a:t>
+            </a:r>
+            <a:endParaRPr lang="en-US" sz="2600" dirty="0"/>
+          </a:p>
+        </p:txBody>
+      </p:sp>
+      <p:sp>
+        <p:nvSpPr>
+          <p:cNvPr id="4" name="Text 2"/>
+          <p:cNvSpPr/>
+          <p:nvPr/>
+        </p:nvSpPr>
+        <p:spPr>
+          <a:xfrm>
+            <a:off x="566928" y="1417320"/>
+            <a:ext cx="11057839" cy="914400"/>
+          </a:xfrm>
+          <a:prstGeom prst="rect">
+            <a:avLst/>
+          </a:prstGeom>
+          <a:noFill/>
+          <a:ln/>
+        </p:spPr>
+        <p:txBody>
+          <a:bodyPr wrap="square" lIns="0" tIns="0" rIns="0" bIns="0" rtlCol="0" anchor="t"/>
+          <a:lstStyle/>
+          <a:p>
+            <a:pPr algn="l" indent="0" marL="0">
+              <a:lnSpc>
+                <a:spcPct val="105000"/>
+              </a:lnSpc>
+              <a:buNone/>
+            </a:pPr>
+            <a:r>
+              <a:rPr lang="en-US" sz="1450" b="1" dirty="0">
+                <a:solidFill>
+                  <a:srgbClr val="1B2A38"/>
+                </a:solidFill>
+                <a:latin typeface="Calibri" pitchFamily="34" charset="0"/>
+                <a:ea typeface="Calibri" pitchFamily="34" charset="-122"/>
+                <a:cs typeface="Calibri" pitchFamily="34" charset="-120"/>
+              </a:rPr>
+              <a:t>To call an antibody specificity with statistical confidence (p ≈ 0.05), the minimum cell requirement is:</a:t>
+            </a:r>
+            <a:endParaRPr lang="en-US" sz="1450" dirty="0"/>
+          </a:p>
+        </p:txBody>
+      </p:sp>
+      <p:sp>
+        <p:nvSpPr>
+          <p:cNvPr id="5" name="Text 3"/>
+          <p:cNvSpPr/>
+          <p:nvPr/>
+        </p:nvSpPr>
+        <p:spPr>
+          <a:xfrm>
+            <a:off x="658368" y="2395728"/>
+            <a:ext cx="6192390" cy="3017520"/>
+          </a:xfrm>
+          <a:prstGeom prst="rect">
+            <a:avLst/>
+          </a:prstGeom>
+          <a:noFill/>
+          <a:ln/>
+        </p:spPr>
+        <p:txBody>
+          <a:bodyPr wrap="square" lIns="0" tIns="0" rIns="0" bIns="0" rtlCol="0" anchor="t"/>
+          <a:lstStyle/>
+          <a:p>
+            <a:pPr algn="l" indent="0" marL="0">
+              <a:spcAft>
+                <a:spcPts val="600"/>
+              </a:spcAft>
+              <a:buNone/>
+            </a:pPr>
+            <a:r>
+              <a:rPr lang="en-US" sz="1350" dirty="0">
+                <a:solidFill>
+                  <a:srgbClr val="33444F"/>
+                </a:solidFill>
+                <a:latin typeface="Calibri" pitchFamily="34" charset="0"/>
+                <a:ea typeface="Calibri" pitchFamily="34" charset="-122"/>
+                <a:cs typeface="Calibri" pitchFamily="34" charset="-120"/>
+              </a:rPr>
+              <a:t>A. 1 positive and 1 negative cell</a:t>
+            </a:r>
+            <a:endParaRPr lang="en-US" sz="1350" dirty="0"/>
+          </a:p>
+          <a:p>
+            <a:pPr algn="l" indent="0" marL="0">
+              <a:spcAft>
+                <a:spcPts val="600"/>
+              </a:spcAft>
+              <a:buNone/>
+            </a:pPr>
+            <a:r>
+              <a:rPr lang="en-US" sz="1350" dirty="0">
+                <a:solidFill>
+                  <a:srgbClr val="33444F"/>
+                </a:solidFill>
+                <a:latin typeface="Calibri" pitchFamily="34" charset="0"/>
+                <a:ea typeface="Calibri" pitchFamily="34" charset="-122"/>
+                <a:cs typeface="Calibri" pitchFamily="34" charset="-120"/>
+              </a:rPr>
+              <a:t>B. 2 positive and 2 negative cells</a:t>
+            </a:r>
+            <a:endParaRPr lang="en-US" sz="1350" dirty="0"/>
+          </a:p>
+          <a:p>
+            <a:pPr algn="l" indent="0" marL="0">
+              <a:spcAft>
+                <a:spcPts val="600"/>
+              </a:spcAft>
+              <a:buNone/>
+            </a:pPr>
+            <a:r>
+              <a:rPr lang="en-US" sz="1350" b="1" dirty="0">
+                <a:solidFill>
+                  <a:srgbClr val="7A0E3C"/>
+                </a:solidFill>
+                <a:latin typeface="Calibri" pitchFamily="34" charset="0"/>
+                <a:ea typeface="Calibri" pitchFamily="34" charset="-122"/>
+                <a:cs typeface="Calibri" pitchFamily="34" charset="-120"/>
+              </a:rPr>
+              <a:t>C. 3 antigen-positive reactive and 3 antigen-negative non-reactive cells</a:t>
+            </a:r>
+            <a:endParaRPr lang="en-US" sz="1350" dirty="0"/>
+          </a:p>
+          <a:p>
+            <a:pPr algn="l" indent="0" marL="0">
+              <a:spcAft>
+                <a:spcPts val="600"/>
+              </a:spcAft>
+              <a:buNone/>
+            </a:pPr>
+            <a:r>
+              <a:rPr lang="en-US" sz="1350" dirty="0">
+                <a:solidFill>
+                  <a:srgbClr val="33444F"/>
+                </a:solidFill>
+                <a:latin typeface="Calibri" pitchFamily="34" charset="0"/>
+                <a:ea typeface="Calibri" pitchFamily="34" charset="-122"/>
+                <a:cs typeface="Calibri" pitchFamily="34" charset="-120"/>
+              </a:rPr>
+              <a:t>D. 5 positive cells only</a:t>
+            </a:r>
+            <a:endParaRPr lang="en-US" sz="1350" dirty="0"/>
+          </a:p>
+          <a:p>
+            <a:pPr algn="l" indent="0" marL="0">
+              <a:spcAft>
+                <a:spcPts val="600"/>
+              </a:spcAft>
+              <a:buNone/>
+            </a:pPr>
+            <a:r>
+              <a:rPr lang="en-US" sz="1350" dirty="0">
+                <a:solidFill>
+                  <a:srgbClr val="33444F"/>
+                </a:solidFill>
+                <a:latin typeface="Calibri" pitchFamily="34" charset="0"/>
+                <a:ea typeface="Calibri" pitchFamily="34" charset="-122"/>
+                <a:cs typeface="Calibri" pitchFamily="34" charset="-120"/>
+              </a:rPr>
+              <a:t>E. All panel cells must react</a:t>
+            </a:r>
+            <a:endParaRPr lang="en-US" sz="1350" dirty="0"/>
+          </a:p>
+        </p:txBody>
+      </p:sp>
+      <p:sp>
+        <p:nvSpPr>
+          <p:cNvPr id="6" name="Shape 4"/>
+          <p:cNvSpPr/>
+          <p:nvPr/>
+        </p:nvSpPr>
+        <p:spPr>
+          <a:xfrm>
+            <a:off x="7201632" y="2395728"/>
+            <a:ext cx="4423136" cy="3246120"/>
+          </a:xfrm>
+          <a:prstGeom prst="roundRect">
+            <a:avLst>
+              <a:gd name="adj" fmla="val 2535"/>
+            </a:avLst>
+          </a:prstGeom>
+          <a:solidFill>
+            <a:srgbClr val="F8E7EF"/>
+          </a:solidFill>
+          <a:ln/>
+          <a:effectLst>
+            <a:outerShdw sx="100000" sy="100000" kx="0" ky="0" algn="bl" rotWithShape="0" blurRad="88900" dist="25400" dir="5400000">
+              <a:srgbClr val="22303C">
+                <a:alpha val="12000"/>
+              </a:srgbClr>
+            </a:outerShdw>
+          </a:effectLst>
+        </p:spPr>
+        <p:txBody>
+          <a:bodyPr/>
+          <a:p/>
+        </p:txBody>
+      </p:sp>
+      <p:sp>
+        <p:nvSpPr>
+          <p:cNvPr id="7" name="Text 5"/>
+          <p:cNvSpPr/>
+          <p:nvPr/>
+        </p:nvSpPr>
+        <p:spPr>
+          <a:xfrm>
+            <a:off x="7439376" y="2578608"/>
+            <a:ext cx="3965936" cy="457200"/>
+          </a:xfrm>
+          <a:prstGeom prst="rect">
+            <a:avLst/>
+          </a:prstGeom>
+          <a:noFill/>
+          <a:ln/>
+        </p:spPr>
+        <p:txBody>
+          <a:bodyPr wrap="square" lIns="0" tIns="0" rIns="0" bIns="0" rtlCol="0" anchor="ctr"/>
+          <a:lstStyle/>
+          <a:p>
+            <a:pPr indent="0" marL="0">
+              <a:buNone/>
+            </a:pPr>
+            <a:r>
+              <a:rPr lang="en-US" sz="1500" b="1" dirty="0">
+                <a:solidFill>
+                  <a:srgbClr val="AD1457"/>
+                </a:solidFill>
+                <a:latin typeface="Calibri" pitchFamily="34" charset="0"/>
+                <a:ea typeface="Calibri" pitchFamily="34" charset="-122"/>
+                <a:cs typeface="Calibri" pitchFamily="34" charset="-120"/>
+              </a:rPr>
+              <a:t>ANSWER  </a:t>
+            </a:r>
+            <a:pPr indent="0" marL="0">
+              <a:buNone/>
+            </a:pPr>
+            <a:r>
+              <a:rPr lang="en-US" sz="1500" b="1" dirty="0">
+                <a:solidFill>
+                  <a:srgbClr val="1B2A38"/>
+                </a:solidFill>
+                <a:latin typeface="Calibri" pitchFamily="34" charset="0"/>
+                <a:ea typeface="Calibri" pitchFamily="34" charset="-122"/>
+                <a:cs typeface="Calibri" pitchFamily="34" charset="-120"/>
+              </a:rPr>
+              <a:t>C — 3 reactive antigen-positive and 3 non-reactive antigen-negative</a:t>
+            </a:r>
+            <a:endParaRPr lang="en-US" sz="1500" dirty="0"/>
+          </a:p>
+        </p:txBody>
+      </p:sp>
+      <p:sp>
+        <p:nvSpPr>
+          <p:cNvPr id="8" name="Text 6"/>
+          <p:cNvSpPr/>
+          <p:nvPr/>
+        </p:nvSpPr>
+        <p:spPr>
+          <a:xfrm>
+            <a:off x="7439376" y="3127248"/>
+            <a:ext cx="3947648" cy="2377440"/>
+          </a:xfrm>
+          <a:prstGeom prst="rect">
+            <a:avLst/>
+          </a:prstGeom>
+          <a:noFill/>
+          <a:ln/>
+        </p:spPr>
+        <p:txBody>
+          <a:bodyPr wrap="square" lIns="0" tIns="0" rIns="0" bIns="0" rtlCol="0" anchor="t"/>
+          <a:lstStyle/>
+          <a:p>
+            <a:pPr algn="l" indent="0" marL="0">
+              <a:lnSpc>
+                <a:spcPct val="108000"/>
+              </a:lnSpc>
+              <a:buNone/>
+            </a:pPr>
+            <a:r>
+              <a:rPr lang="en-US" sz="1250" dirty="0">
+                <a:solidFill>
+                  <a:srgbClr val="33444F"/>
+                </a:solidFill>
+                <a:latin typeface="Calibri" pitchFamily="34" charset="0"/>
+                <a:ea typeface="Calibri" pitchFamily="34" charset="-122"/>
+                <a:cs typeface="Calibri" pitchFamily="34" charset="-120"/>
+              </a:rPr>
+              <a:t>The rule of three gives a p value of approximately 0.05 — three antigen-positive cells that react and three antigen-negative cells that do not, confirming the pattern is not chance.</a:t>
+            </a:r>
+            <a:endParaRPr lang="en-US" sz="1250" dirty="0"/>
+          </a:p>
+        </p:txBody>
+      </p:sp>
+      <p:sp>
+        <p:nvSpPr>
+          <p:cNvPr id="9" name="Text 7"/>
+          <p:cNvSpPr/>
+          <p:nvPr/>
+        </p:nvSpPr>
+        <p:spPr>
+          <a:xfrm>
+            <a:off x="566928" y="6473952"/>
+            <a:ext cx="7772400" cy="274320"/>
+          </a:xfrm>
+          <a:prstGeom prst="rect">
+            <a:avLst/>
+          </a:prstGeom>
+          <a:noFill/>
+          <a:ln/>
+        </p:spPr>
+        <p:txBody>
+          <a:bodyPr wrap="square" lIns="0" tIns="0" rIns="0" bIns="0" rtlCol="0" anchor="ctr"/>
+          <a:lstStyle/>
+          <a:p>
+            <a:pPr algn="l" indent="0" marL="0">
+              <a:buNone/>
+            </a:pPr>
+            <a:r>
+              <a:rPr lang="en-US" sz="850" dirty="0">
+                <a:solidFill>
+                  <a:srgbClr val="9AA8B4"/>
+                </a:solidFill>
+                <a:latin typeface="Calibri" pitchFamily="34" charset="0"/>
+                <a:ea typeface="Calibri" pitchFamily="34" charset="-122"/>
+                <a:cs typeface="Calibri" pitchFamily="34" charset="-120"/>
+              </a:rPr>
+              <a:t>Makassed General Hospital  ·  Department of Laboratory Medicine</a:t>
+            </a:r>
+            <a:endParaRPr lang="en-US" sz="850" dirty="0"/>
+          </a:p>
+        </p:txBody>
+      </p:sp>
+      <p:sp>
+        <p:nvSpPr>
+          <p:cNvPr id="10" name="Text 8"/>
+          <p:cNvSpPr/>
+          <p:nvPr/>
+        </p:nvSpPr>
+        <p:spPr>
+          <a:xfrm>
+            <a:off x="9814255" y="6473952"/>
+            <a:ext cx="1828800" cy="274320"/>
+          </a:xfrm>
+          <a:prstGeom prst="rect">
+            <a:avLst/>
+          </a:prstGeom>
+          <a:noFill/>
+          <a:ln/>
+        </p:spPr>
+        <p:txBody>
+          <a:bodyPr wrap="square" lIns="0" tIns="0" rIns="0" bIns="0" rtlCol="0" anchor="ctr"/>
+          <a:lstStyle/>
+          <a:p>
+            <a:pPr algn="r" indent="0" marL="0">
+              <a:buNone/>
+            </a:pPr>
+            <a:r>
+              <a:rPr lang="en-US" sz="850" dirty="0">
+                <a:solidFill>
+                  <a:srgbClr val="9AA8B4"/>
+                </a:solidFill>
+                <a:latin typeface="Calibri" pitchFamily="34" charset="0"/>
+                <a:ea typeface="Calibri" pitchFamily="34" charset="-122"/>
+                <a:cs typeface="Calibri" pitchFamily="34" charset="-120"/>
+              </a:rPr>
+              <a:t>CP Lecture Series</a:t>
+            </a:r>
+            <a:pPr algn="r" indent="0" marL="0">
+              <a:buNone/>
+            </a:pPr>
+            <a:r>
+              <a:rPr lang="en-US" sz="850" dirty="0">
+                <a:solidFill>
+                  <a:srgbClr val="DCE4EC"/>
+                </a:solidFill>
+                <a:latin typeface="Calibri" pitchFamily="34" charset="0"/>
+                <a:ea typeface="Calibri" pitchFamily="34" charset="-122"/>
+                <a:cs typeface="Calibri" pitchFamily="34" charset="-120"/>
+              </a:rPr>
+              <a:t>   ·   </a:t>
+            </a:r>
+            <a:pPr algn="r" indent="0" marL="0">
+              <a:buNone/>
+            </a:pPr>
+            <a:r>
+              <a:rPr lang="en-US" sz="850" b="1" dirty="0">
+                <a:solidFill>
+                  <a:srgbClr val="AD1457"/>
+                </a:solidFill>
+                <a:latin typeface="Calibri" pitchFamily="34" charset="0"/>
+                <a:ea typeface="Calibri" pitchFamily="34" charset="-122"/>
+                <a:cs typeface="Calibri" pitchFamily="34" charset="-120"/>
+              </a:rPr>
+              <a:t>37</a:t>
+            </a:r>
+            <a:endParaRPr lang="en-US" sz="850" dirty="0"/>
+          </a:p>
+        </p:txBody>
+      </p:sp>
+    </p:spTree>
+  </p:cSld>
+  <p:clrMapOvr>
+    <a:masterClrMapping/>
+  </p:clrMapOvr>
+</p:sld>
+</file>
+
+<file path=ppt/slides/slide49.xml><?xml version="1.0" encoding="utf-8"?>
+<p:sld xmlns:a="http://schemas.openxmlformats.org/drawingml/2006/main" xmlns:p="http://schemas.openxmlformats.org/presentationml/2006/main" xmlns:r="http://schemas.openxmlformats.org/officeDocument/2006/relationships">
+  <p:cSld>
+    <p:spTree>
+      <p:nvGrpSpPr>
+        <p:cNvPr id="1" name=""/>
+        <p:cNvGrpSpPr/>
+        <p:nvPr/>
+      </p:nvGrpSpPr>
+      <p:grpSpPr/>
+      <p:sp>
+        <p:nvSpPr>
+          <p:cNvPr id="2" name="Text 0"/>
+          <p:cNvSpPr/>
+          <p:nvPr/>
+        </p:nvSpPr>
+        <p:spPr>
+          <a:xfrm>
+            <a:off x="566928" y="329184"/>
+            <a:ext cx="10515600" cy="310896"/>
+          </a:xfrm>
+          <a:prstGeom prst="rect">
+            <a:avLst/>
+          </a:prstGeom>
+          <a:noFill/>
+          <a:ln/>
+        </p:spPr>
+        <p:txBody>
+          <a:bodyPr wrap="square" lIns="0" tIns="0" rIns="0" bIns="0" rtlCol="0" anchor="ctr"/>
+          <a:lstStyle/>
+          <a:p>
+            <a:pPr algn="l" indent="0" marL="0">
+              <a:buNone/>
+            </a:pPr>
+            <a:r>
+              <a:rPr lang="en-US" sz="1100" b="1" spc="150" kern="0" dirty="0">
+                <a:solidFill>
+                  <a:srgbClr val="AD1457"/>
+                </a:solidFill>
+                <a:latin typeface="Calibri" pitchFamily="34" charset="0"/>
+                <a:ea typeface="Calibri" pitchFamily="34" charset="-122"/>
+                <a:cs typeface="Calibri" pitchFamily="34" charset="-120"/>
+              </a:rPr>
+              <a:t>TRANSFUSION MEDICINE   ·   BOARD REVIEW  ·  Q3</a:t>
+            </a:r>
+            <a:endParaRPr lang="en-US" sz="1100" dirty="0"/>
+          </a:p>
+        </p:txBody>
+      </p:sp>
+      <p:sp>
+        <p:nvSpPr>
+          <p:cNvPr id="3" name="Text 1"/>
+          <p:cNvSpPr/>
+          <p:nvPr/>
+        </p:nvSpPr>
+        <p:spPr>
+          <a:xfrm>
+            <a:off x="566928" y="713232"/>
+            <a:ext cx="11064240" cy="749808"/>
+          </a:xfrm>
+          <a:prstGeom prst="rect">
+            <a:avLst/>
+          </a:prstGeom>
+          <a:noFill/>
+          <a:ln/>
+        </p:spPr>
+        <p:txBody>
+          <a:bodyPr wrap="square" lIns="0" tIns="0" rIns="0" bIns="0" rtlCol="0" anchor="ctr"/>
+          <a:lstStyle/>
+          <a:p>
+            <a:pPr algn="l" indent="0" marL="0">
+              <a:buNone/>
+            </a:pPr>
+            <a:r>
+              <a:rPr lang="en-US" sz="2600" b="1" dirty="0">
+                <a:solidFill>
+                  <a:srgbClr val="0E3A5F"/>
+                </a:solidFill>
+                <a:latin typeface="Calibri" pitchFamily="34" charset="0"/>
+                <a:ea typeface="Calibri" pitchFamily="34" charset="-122"/>
+                <a:cs typeface="Calibri" pitchFamily="34" charset="-120"/>
+              </a:rPr>
+              <a:t>Board-Style Review</a:t>
+            </a:r>
+            <a:endParaRPr lang="en-US" sz="2600" dirty="0"/>
+          </a:p>
+        </p:txBody>
+      </p:sp>
+      <p:sp>
+        <p:nvSpPr>
+          <p:cNvPr id="4" name="Text 2"/>
+          <p:cNvSpPr/>
+          <p:nvPr/>
+        </p:nvSpPr>
+        <p:spPr>
+          <a:xfrm>
+            <a:off x="566928" y="1417320"/>
+            <a:ext cx="11057839" cy="914400"/>
+          </a:xfrm>
+          <a:prstGeom prst="rect">
+            <a:avLst/>
+          </a:prstGeom>
+          <a:noFill/>
+          <a:ln/>
+        </p:spPr>
+        <p:txBody>
+          <a:bodyPr wrap="square" lIns="0" tIns="0" rIns="0" bIns="0" rtlCol="0" anchor="t"/>
+          <a:lstStyle/>
+          <a:p>
+            <a:pPr algn="l" indent="0" marL="0">
+              <a:lnSpc>
+                <a:spcPct val="105000"/>
+              </a:lnSpc>
+              <a:buNone/>
+            </a:pPr>
+            <a:r>
+              <a:rPr lang="en-US" sz="1450" b="1" dirty="0">
+                <a:solidFill>
+                  <a:srgbClr val="1B2A38"/>
+                </a:solidFill>
+                <a:latin typeface="Calibri" pitchFamily="34" charset="0"/>
+                <a:ea typeface="Calibri" pitchFamily="34" charset="-122"/>
+                <a:cs typeface="Calibri" pitchFamily="34" charset="-120"/>
+              </a:rPr>
+              <a:t>A patient with anemia after Mycoplasma pneumoniae has a DAT positive for C3d only and a high-titer cold agglutinin. Which antibody specificity is most likely?</a:t>
+            </a:r>
+            <a:endParaRPr lang="en-US" sz="1450" dirty="0"/>
+          </a:p>
+        </p:txBody>
+      </p:sp>
+      <p:sp>
+        <p:nvSpPr>
+          <p:cNvPr id="5" name="Text 3"/>
+          <p:cNvSpPr/>
+          <p:nvPr/>
+        </p:nvSpPr>
+        <p:spPr>
+          <a:xfrm>
+            <a:off x="658368" y="2395728"/>
+            <a:ext cx="6192390" cy="3017520"/>
+          </a:xfrm>
+          <a:prstGeom prst="rect">
+            <a:avLst/>
+          </a:prstGeom>
+          <a:noFill/>
+          <a:ln/>
+        </p:spPr>
+        <p:txBody>
+          <a:bodyPr wrap="square" lIns="0" tIns="0" rIns="0" bIns="0" rtlCol="0" anchor="t"/>
+          <a:lstStyle/>
+          <a:p>
+            <a:pPr algn="l" indent="0" marL="0">
+              <a:spcAft>
+                <a:spcPts val="600"/>
+              </a:spcAft>
+              <a:buNone/>
+            </a:pPr>
+            <a:r>
+              <a:rPr lang="en-US" sz="1350" dirty="0">
+                <a:solidFill>
+                  <a:srgbClr val="33444F"/>
+                </a:solidFill>
+                <a:latin typeface="Calibri" pitchFamily="34" charset="0"/>
+                <a:ea typeface="Calibri" pitchFamily="34" charset="-122"/>
+                <a:cs typeface="Calibri" pitchFamily="34" charset="-120"/>
+              </a:rPr>
+              <a:t>A. Anti-P (Donath-Landsteiner)</a:t>
+            </a:r>
+            <a:endParaRPr lang="en-US" sz="1350" dirty="0"/>
+          </a:p>
+          <a:p>
+            <a:pPr algn="l" indent="0" marL="0">
+              <a:spcAft>
+                <a:spcPts val="600"/>
+              </a:spcAft>
+              <a:buNone/>
+            </a:pPr>
+            <a:r>
+              <a:rPr lang="en-US" sz="1350" b="1" dirty="0">
+                <a:solidFill>
+                  <a:srgbClr val="7A0E3C"/>
+                </a:solidFill>
+                <a:latin typeface="Calibri" pitchFamily="34" charset="0"/>
+                <a:ea typeface="Calibri" pitchFamily="34" charset="-122"/>
+                <a:cs typeface="Calibri" pitchFamily="34" charset="-120"/>
+              </a:rPr>
+              <a:t>B. Anti-I</a:t>
+            </a:r>
+            <a:endParaRPr lang="en-US" sz="1350" dirty="0"/>
+          </a:p>
+          <a:p>
+            <a:pPr algn="l" indent="0" marL="0">
+              <a:spcAft>
+                <a:spcPts val="600"/>
+              </a:spcAft>
+              <a:buNone/>
+            </a:pPr>
+            <a:r>
+              <a:rPr lang="en-US" sz="1350" dirty="0">
+                <a:solidFill>
+                  <a:srgbClr val="33444F"/>
+                </a:solidFill>
+                <a:latin typeface="Calibri" pitchFamily="34" charset="0"/>
+                <a:ea typeface="Calibri" pitchFamily="34" charset="-122"/>
+                <a:cs typeface="Calibri" pitchFamily="34" charset="-120"/>
+              </a:rPr>
+              <a:t>C. Anti-K</a:t>
+            </a:r>
+            <a:endParaRPr lang="en-US" sz="1350" dirty="0"/>
+          </a:p>
+          <a:p>
+            <a:pPr algn="l" indent="0" marL="0">
+              <a:spcAft>
+                <a:spcPts val="600"/>
+              </a:spcAft>
+              <a:buNone/>
+            </a:pPr>
+            <a:r>
+              <a:rPr lang="en-US" sz="1350" dirty="0">
+                <a:solidFill>
+                  <a:srgbClr val="33444F"/>
+                </a:solidFill>
+                <a:latin typeface="Calibri" pitchFamily="34" charset="0"/>
+                <a:ea typeface="Calibri" pitchFamily="34" charset="-122"/>
+                <a:cs typeface="Calibri" pitchFamily="34" charset="-120"/>
+              </a:rPr>
+              <a:t>D. Anti-Jka</a:t>
+            </a:r>
+            <a:endParaRPr lang="en-US" sz="1350" dirty="0"/>
+          </a:p>
+          <a:p>
+            <a:pPr algn="l" indent="0" marL="0">
+              <a:spcAft>
+                <a:spcPts val="600"/>
+              </a:spcAft>
+              <a:buNone/>
+            </a:pPr>
+            <a:r>
+              <a:rPr lang="en-US" sz="1350" dirty="0">
+                <a:solidFill>
+                  <a:srgbClr val="33444F"/>
+                </a:solidFill>
+                <a:latin typeface="Calibri" pitchFamily="34" charset="0"/>
+                <a:ea typeface="Calibri" pitchFamily="34" charset="-122"/>
+                <a:cs typeface="Calibri" pitchFamily="34" charset="-120"/>
+              </a:rPr>
+              <a:t>E. Anti-D</a:t>
+            </a:r>
+            <a:endParaRPr lang="en-US" sz="1350" dirty="0"/>
+          </a:p>
+        </p:txBody>
+      </p:sp>
+      <p:sp>
+        <p:nvSpPr>
+          <p:cNvPr id="6" name="Shape 4"/>
+          <p:cNvSpPr/>
+          <p:nvPr/>
+        </p:nvSpPr>
+        <p:spPr>
+          <a:xfrm>
+            <a:off x="7201632" y="2395728"/>
+            <a:ext cx="4423136" cy="3246120"/>
+          </a:xfrm>
+          <a:prstGeom prst="roundRect">
+            <a:avLst>
+              <a:gd name="adj" fmla="val 2535"/>
+            </a:avLst>
+          </a:prstGeom>
+          <a:solidFill>
+            <a:srgbClr val="F8E7EF"/>
+          </a:solidFill>
+          <a:ln/>
+          <a:effectLst>
+            <a:outerShdw sx="100000" sy="100000" kx="0" ky="0" algn="bl" rotWithShape="0" blurRad="88900" dist="25400" dir="5400000">
+              <a:srgbClr val="22303C">
+                <a:alpha val="12000"/>
+              </a:srgbClr>
+            </a:outerShdw>
+          </a:effectLst>
+        </p:spPr>
+        <p:txBody>
+          <a:bodyPr/>
+          <a:p/>
+        </p:txBody>
+      </p:sp>
+      <p:sp>
+        <p:nvSpPr>
+          <p:cNvPr id="7" name="Text 5"/>
+          <p:cNvSpPr/>
+          <p:nvPr/>
+        </p:nvSpPr>
+        <p:spPr>
+          <a:xfrm>
+            <a:off x="7439376" y="2578608"/>
+            <a:ext cx="3965936" cy="457200"/>
+          </a:xfrm>
+          <a:prstGeom prst="rect">
+            <a:avLst/>
+          </a:prstGeom>
+          <a:noFill/>
+          <a:ln/>
+        </p:spPr>
+        <p:txBody>
+          <a:bodyPr wrap="square" lIns="0" tIns="0" rIns="0" bIns="0" rtlCol="0" anchor="ctr"/>
+          <a:lstStyle/>
+          <a:p>
+            <a:pPr indent="0" marL="0">
+              <a:buNone/>
+            </a:pPr>
+            <a:r>
+              <a:rPr lang="en-US" sz="1500" b="1" dirty="0">
+                <a:solidFill>
+                  <a:srgbClr val="AD1457"/>
+                </a:solidFill>
+                <a:latin typeface="Calibri" pitchFamily="34" charset="0"/>
+                <a:ea typeface="Calibri" pitchFamily="34" charset="-122"/>
+                <a:cs typeface="Calibri" pitchFamily="34" charset="-120"/>
+              </a:rPr>
+              <a:t>ANSWER  </a:t>
+            </a:r>
+            <a:pPr indent="0" marL="0">
+              <a:buNone/>
+            </a:pPr>
+            <a:r>
+              <a:rPr lang="en-US" sz="1500" b="1" dirty="0">
+                <a:solidFill>
+                  <a:srgbClr val="1B2A38"/>
+                </a:solidFill>
+                <a:latin typeface="Calibri" pitchFamily="34" charset="0"/>
+                <a:ea typeface="Calibri" pitchFamily="34" charset="-122"/>
+                <a:cs typeface="Calibri" pitchFamily="34" charset="-120"/>
+              </a:rPr>
+              <a:t>B — Anti-I</a:t>
+            </a:r>
+            <a:endParaRPr lang="en-US" sz="1500" dirty="0"/>
+          </a:p>
+        </p:txBody>
+      </p:sp>
+      <p:sp>
+        <p:nvSpPr>
+          <p:cNvPr id="8" name="Text 6"/>
+          <p:cNvSpPr/>
+          <p:nvPr/>
+        </p:nvSpPr>
+        <p:spPr>
+          <a:xfrm>
+            <a:off x="7439376" y="3127248"/>
+            <a:ext cx="3947648" cy="2377440"/>
+          </a:xfrm>
+          <a:prstGeom prst="rect">
+            <a:avLst/>
+          </a:prstGeom>
+          <a:noFill/>
+          <a:ln/>
+        </p:spPr>
+        <p:txBody>
+          <a:bodyPr wrap="square" lIns="0" tIns="0" rIns="0" bIns="0" rtlCol="0" anchor="t"/>
+          <a:lstStyle/>
+          <a:p>
+            <a:pPr algn="l" indent="0" marL="0">
+              <a:lnSpc>
+                <a:spcPct val="108000"/>
+              </a:lnSpc>
+              <a:buNone/>
+            </a:pPr>
+            <a:r>
+              <a:rPr lang="en-US" sz="1250" dirty="0">
+                <a:solidFill>
+                  <a:srgbClr val="33444F"/>
+                </a:solidFill>
+                <a:latin typeface="Calibri" pitchFamily="34" charset="0"/>
+                <a:ea typeface="Calibri" pitchFamily="34" charset="-122"/>
+                <a:cs typeface="Calibri" pitchFamily="34" charset="-120"/>
+              </a:rPr>
+              <a:t>Cold agglutinin disease, classically post-Mycoplasma, is usually IgM anti-I that fixes complement; the IgM elutes in vivo leaving C3d on the DAT. Anti-P (biphasic) causes PCH.</a:t>
+            </a:r>
+            <a:endParaRPr lang="en-US" sz="1250" dirty="0"/>
+          </a:p>
+        </p:txBody>
+      </p:sp>
+      <p:sp>
+        <p:nvSpPr>
+          <p:cNvPr id="9" name="Text 7"/>
+          <p:cNvSpPr/>
+          <p:nvPr/>
+        </p:nvSpPr>
+        <p:spPr>
+          <a:xfrm>
+            <a:off x="566928" y="6473952"/>
+            <a:ext cx="7772400" cy="274320"/>
+          </a:xfrm>
+          <a:prstGeom prst="rect">
+            <a:avLst/>
+          </a:prstGeom>
+          <a:noFill/>
+          <a:ln/>
+        </p:spPr>
+        <p:txBody>
+          <a:bodyPr wrap="square" lIns="0" tIns="0" rIns="0" bIns="0" rtlCol="0" anchor="ctr"/>
+          <a:lstStyle/>
+          <a:p>
+            <a:pPr algn="l" indent="0" marL="0">
+              <a:buNone/>
+            </a:pPr>
+            <a:r>
+              <a:rPr lang="en-US" sz="850" dirty="0">
+                <a:solidFill>
+                  <a:srgbClr val="9AA8B4"/>
+                </a:solidFill>
+                <a:latin typeface="Calibri" pitchFamily="34" charset="0"/>
+                <a:ea typeface="Calibri" pitchFamily="34" charset="-122"/>
+                <a:cs typeface="Calibri" pitchFamily="34" charset="-120"/>
+              </a:rPr>
+              <a:t>Makassed General Hospital  ·  Department of Laboratory Medicine</a:t>
+            </a:r>
+            <a:endParaRPr lang="en-US" sz="850" dirty="0"/>
+          </a:p>
+        </p:txBody>
+      </p:sp>
+      <p:sp>
+        <p:nvSpPr>
+          <p:cNvPr id="10" name="Text 8"/>
+          <p:cNvSpPr/>
+          <p:nvPr/>
+        </p:nvSpPr>
+        <p:spPr>
+          <a:xfrm>
+            <a:off x="9814255" y="6473952"/>
+            <a:ext cx="1828800" cy="274320"/>
+          </a:xfrm>
+          <a:prstGeom prst="rect">
+            <a:avLst/>
+          </a:prstGeom>
+          <a:noFill/>
+          <a:ln/>
+        </p:spPr>
+        <p:txBody>
+          <a:bodyPr wrap="square" lIns="0" tIns="0" rIns="0" bIns="0" rtlCol="0" anchor="ctr"/>
+          <a:lstStyle/>
+          <a:p>
+            <a:pPr algn="r" indent="0" marL="0">
+              <a:buNone/>
+            </a:pPr>
+            <a:r>
+              <a:rPr lang="en-US" sz="850" dirty="0">
+                <a:solidFill>
+                  <a:srgbClr val="9AA8B4"/>
+                </a:solidFill>
+                <a:latin typeface="Calibri" pitchFamily="34" charset="0"/>
+                <a:ea typeface="Calibri" pitchFamily="34" charset="-122"/>
+                <a:cs typeface="Calibri" pitchFamily="34" charset="-120"/>
+              </a:rPr>
+              <a:t>CP Lecture Series</a:t>
+            </a:r>
+            <a:pPr algn="r" indent="0" marL="0">
+              <a:buNone/>
+            </a:pPr>
+            <a:r>
+              <a:rPr lang="en-US" sz="850" dirty="0">
+                <a:solidFill>
+                  <a:srgbClr val="DCE4EC"/>
+                </a:solidFill>
+                <a:latin typeface="Calibri" pitchFamily="34" charset="0"/>
+                <a:ea typeface="Calibri" pitchFamily="34" charset="-122"/>
+                <a:cs typeface="Calibri" pitchFamily="34" charset="-120"/>
+              </a:rPr>
+              <a:t>   ·   </a:t>
+            </a:r>
+            <a:pPr algn="r" indent="0" marL="0">
+              <a:buNone/>
+            </a:pPr>
+            <a:r>
+              <a:rPr lang="en-US" sz="850" b="1" dirty="0">
+                <a:solidFill>
+                  <a:srgbClr val="AD1457"/>
+                </a:solidFill>
+                <a:latin typeface="Calibri" pitchFamily="34" charset="0"/>
+                <a:ea typeface="Calibri" pitchFamily="34" charset="-122"/>
+                <a:cs typeface="Calibri" pitchFamily="34" charset="-120"/>
+              </a:rPr>
+              <a:t>36</a:t>
+            </a:r>
+            <a:endParaRPr lang="en-US" sz="850" dirty="0"/>
+          </a:p>
+        </p:txBody>
+      </p:sp>
+    </p:spTree>
+  </p:cSld>
+  <p:clrMapOvr>
+    <a:masterClrMapping/>
+  </p:clrMapOvr>
+</p:sld>
+</file>
+
 <file path=ppt/slides/slide5.xml><?xml version="1.0" encoding="utf-8"?>
 <p:sld xmlns:a="http://schemas.openxmlformats.org/drawingml/2006/main" xmlns:r="http://schemas.openxmlformats.org/officeDocument/2006/relationships" xmlns:p="http://schemas.openxmlformats.org/presentationml/2006/main">
   <p:cSld name="Slide 5">
@@ -29278,6 +30242,10 @@
           </a:solidFill>
           <a:ln/>
         </p:spPr>
+        <p:txBody>
+          <a:bodyPr/>
+          <a:p/>
+        </p:txBody>
       </p:sp>
       <p:sp>
         <p:nvSpPr>
@@ -29300,6 +30268,10 @@
           </a:solidFill>
           <a:ln/>
         </p:spPr>
+        <p:txBody>
+          <a:bodyPr/>
+          <a:p/>
+        </p:txBody>
       </p:sp>
       <p:sp>
         <p:nvSpPr>
@@ -29415,6 +30387,994 @@
               <a:t>The Immunohematology Foundation</a:t>
             </a:r>
             <a:endParaRPr lang="en-US" sz="3800" dirty="0"/>
+          </a:p>
+        </p:txBody>
+      </p:sp>
+    </p:spTree>
+  </p:cSld>
+  <p:clrMapOvr>
+    <a:masterClrMapping/>
+  </p:clrMapOvr>
+</p:sld>
+</file>
+
+<file path=ppt/slides/slide50.xml><?xml version="1.0" encoding="utf-8"?>
+<p:sld xmlns:a="http://schemas.openxmlformats.org/drawingml/2006/main" xmlns:p="http://schemas.openxmlformats.org/presentationml/2006/main" xmlns:r="http://schemas.openxmlformats.org/officeDocument/2006/relationships">
+  <p:cSld>
+    <p:spTree>
+      <p:nvGrpSpPr>
+        <p:cNvPr id="1" name=""/>
+        <p:cNvGrpSpPr/>
+        <p:nvPr/>
+      </p:nvGrpSpPr>
+      <p:grpSpPr/>
+      <p:sp>
+        <p:nvSpPr>
+          <p:cNvPr id="2" name="Text 0"/>
+          <p:cNvSpPr/>
+          <p:nvPr/>
+        </p:nvSpPr>
+        <p:spPr>
+          <a:xfrm>
+            <a:off x="566928" y="329184"/>
+            <a:ext cx="10515600" cy="310896"/>
+          </a:xfrm>
+          <a:prstGeom prst="rect">
+            <a:avLst/>
+          </a:prstGeom>
+          <a:noFill/>
+          <a:ln/>
+        </p:spPr>
+        <p:txBody>
+          <a:bodyPr wrap="square" lIns="0" tIns="0" rIns="0" bIns="0" rtlCol="0" anchor="ctr"/>
+          <a:lstStyle/>
+          <a:p>
+            <a:pPr algn="l" indent="0" marL="0">
+              <a:buNone/>
+            </a:pPr>
+            <a:r>
+              <a:rPr lang="en-US" sz="1100" b="1" spc="150" kern="0" dirty="0">
+                <a:solidFill>
+                  <a:srgbClr val="AD1457"/>
+                </a:solidFill>
+                <a:latin typeface="Calibri" pitchFamily="34" charset="0"/>
+                <a:ea typeface="Calibri" pitchFamily="34" charset="-122"/>
+                <a:cs typeface="Calibri" pitchFamily="34" charset="-120"/>
+              </a:rPr>
+              <a:t>TRANSFUSION MEDICINE   ·   BOARD REVIEW  ·  Q2</a:t>
+            </a:r>
+            <a:endParaRPr lang="en-US" sz="1100" dirty="0"/>
+          </a:p>
+        </p:txBody>
+      </p:sp>
+      <p:sp>
+        <p:nvSpPr>
+          <p:cNvPr id="3" name="Text 1"/>
+          <p:cNvSpPr/>
+          <p:nvPr/>
+        </p:nvSpPr>
+        <p:spPr>
+          <a:xfrm>
+            <a:off x="566928" y="713232"/>
+            <a:ext cx="11064240" cy="749808"/>
+          </a:xfrm>
+          <a:prstGeom prst="rect">
+            <a:avLst/>
+          </a:prstGeom>
+          <a:noFill/>
+          <a:ln/>
+        </p:spPr>
+        <p:txBody>
+          <a:bodyPr wrap="square" lIns="0" tIns="0" rIns="0" bIns="0" rtlCol="0" anchor="ctr"/>
+          <a:lstStyle/>
+          <a:p>
+            <a:pPr algn="l" indent="0" marL="0">
+              <a:buNone/>
+            </a:pPr>
+            <a:r>
+              <a:rPr lang="en-US" sz="2600" b="1" dirty="0">
+                <a:solidFill>
+                  <a:srgbClr val="0E3A5F"/>
+                </a:solidFill>
+                <a:latin typeface="Calibri" pitchFamily="34" charset="0"/>
+                <a:ea typeface="Calibri" pitchFamily="34" charset="-122"/>
+                <a:cs typeface="Calibri" pitchFamily="34" charset="-120"/>
+              </a:rPr>
+              <a:t>Board-Style Review</a:t>
+            </a:r>
+            <a:endParaRPr lang="en-US" sz="2600" dirty="0"/>
+          </a:p>
+        </p:txBody>
+      </p:sp>
+      <p:sp>
+        <p:nvSpPr>
+          <p:cNvPr id="4" name="Text 2"/>
+          <p:cNvSpPr/>
+          <p:nvPr/>
+        </p:nvSpPr>
+        <p:spPr>
+          <a:xfrm>
+            <a:off x="566928" y="1417320"/>
+            <a:ext cx="11057839" cy="914400"/>
+          </a:xfrm>
+          <a:prstGeom prst="rect">
+            <a:avLst/>
+          </a:prstGeom>
+          <a:noFill/>
+          <a:ln/>
+        </p:spPr>
+        <p:txBody>
+          <a:bodyPr wrap="square" lIns="0" tIns="0" rIns="0" bIns="0" rtlCol="0" anchor="t"/>
+          <a:lstStyle/>
+          <a:p>
+            <a:pPr algn="l" indent="0" marL="0">
+              <a:lnSpc>
+                <a:spcPct val="105000"/>
+              </a:lnSpc>
+              <a:buNone/>
+            </a:pPr>
+            <a:r>
+              <a:rPr lang="en-US" sz="1450" b="1" dirty="0">
+                <a:solidFill>
+                  <a:srgbClr val="1B2A38"/>
+                </a:solidFill>
+                <a:latin typeface="Calibri" pitchFamily="34" charset="0"/>
+                <a:ea typeface="Calibri" pitchFamily="34" charset="-122"/>
+                <a:cs typeface="Calibri" pitchFamily="34" charset="-120"/>
+              </a:rPr>
+              <a:t>An anti-Jka reacts strongly with Jk(a+b–) cells but weakly or negatively with Jk(a+b+) cells. What property explains this, and what is the practical rule?</a:t>
+            </a:r>
+            <a:endParaRPr lang="en-US" sz="1450" dirty="0"/>
+          </a:p>
+        </p:txBody>
+      </p:sp>
+      <p:sp>
+        <p:nvSpPr>
+          <p:cNvPr id="5" name="Text 3"/>
+          <p:cNvSpPr/>
+          <p:nvPr/>
+        </p:nvSpPr>
+        <p:spPr>
+          <a:xfrm>
+            <a:off x="658368" y="2395728"/>
+            <a:ext cx="6192390" cy="3017520"/>
+          </a:xfrm>
+          <a:prstGeom prst="rect">
+            <a:avLst/>
+          </a:prstGeom>
+          <a:noFill/>
+          <a:ln/>
+        </p:spPr>
+        <p:txBody>
+          <a:bodyPr wrap="square" lIns="0" tIns="0" rIns="0" bIns="0" rtlCol="0" anchor="t"/>
+          <a:lstStyle/>
+          <a:p>
+            <a:pPr algn="l" indent="0" marL="0">
+              <a:spcAft>
+                <a:spcPts val="600"/>
+              </a:spcAft>
+              <a:buNone/>
+            </a:pPr>
+            <a:r>
+              <a:rPr lang="en-US" sz="1350" dirty="0">
+                <a:solidFill>
+                  <a:srgbClr val="33444F"/>
+                </a:solidFill>
+                <a:latin typeface="Calibri" pitchFamily="34" charset="0"/>
+                <a:ea typeface="Calibri" pitchFamily="34" charset="-122"/>
+                <a:cs typeface="Calibri" pitchFamily="34" charset="-120"/>
+              </a:rPr>
+              <a:t>A. Prozone; dilute the serum</a:t>
+            </a:r>
+            <a:endParaRPr lang="en-US" sz="1350" dirty="0"/>
+          </a:p>
+          <a:p>
+            <a:pPr algn="l" indent="0" marL="0">
+              <a:spcAft>
+                <a:spcPts val="600"/>
+              </a:spcAft>
+              <a:buNone/>
+            </a:pPr>
+            <a:r>
+              <a:rPr lang="en-US" sz="1350" b="1" dirty="0">
+                <a:solidFill>
+                  <a:srgbClr val="7A0E3C"/>
+                </a:solidFill>
+                <a:latin typeface="Calibri" pitchFamily="34" charset="0"/>
+                <a:ea typeface="Calibri" pitchFamily="34" charset="-122"/>
+                <a:cs typeface="Calibri" pitchFamily="34" charset="-120"/>
+              </a:rPr>
+              <a:t>B. Dosage effect; rule out only on homozygous cells</a:t>
+            </a:r>
+            <a:endParaRPr lang="en-US" sz="1350" dirty="0"/>
+          </a:p>
+          <a:p>
+            <a:pPr algn="l" indent="0" marL="0">
+              <a:spcAft>
+                <a:spcPts val="600"/>
+              </a:spcAft>
+              <a:buNone/>
+            </a:pPr>
+            <a:r>
+              <a:rPr lang="en-US" sz="1350" dirty="0">
+                <a:solidFill>
+                  <a:srgbClr val="33444F"/>
+                </a:solidFill>
+                <a:latin typeface="Calibri" pitchFamily="34" charset="0"/>
+                <a:ea typeface="Calibri" pitchFamily="34" charset="-122"/>
+                <a:cs typeface="Calibri" pitchFamily="34" charset="-120"/>
+              </a:rPr>
+              <a:t>C. A cold antibody; prewarm</a:t>
+            </a:r>
+            <a:endParaRPr lang="en-US" sz="1350" dirty="0"/>
+          </a:p>
+          <a:p>
+            <a:pPr algn="l" indent="0" marL="0">
+              <a:spcAft>
+                <a:spcPts val="600"/>
+              </a:spcAft>
+              <a:buNone/>
+            </a:pPr>
+            <a:r>
+              <a:rPr lang="en-US" sz="1350" dirty="0">
+                <a:solidFill>
+                  <a:srgbClr val="33444F"/>
+                </a:solidFill>
+                <a:latin typeface="Calibri" pitchFamily="34" charset="0"/>
+                <a:ea typeface="Calibri" pitchFamily="34" charset="-122"/>
+                <a:cs typeface="Calibri" pitchFamily="34" charset="-120"/>
+              </a:rPr>
+              <a:t>D. Complement interference; use EDTA</a:t>
+            </a:r>
+            <a:endParaRPr lang="en-US" sz="1350" dirty="0"/>
+          </a:p>
+          <a:p>
+            <a:pPr algn="l" indent="0" marL="0">
+              <a:spcAft>
+                <a:spcPts val="600"/>
+              </a:spcAft>
+              <a:buNone/>
+            </a:pPr>
+            <a:r>
+              <a:rPr lang="en-US" sz="1350" dirty="0">
+                <a:solidFill>
+                  <a:srgbClr val="33444F"/>
+                </a:solidFill>
+                <a:latin typeface="Calibri" pitchFamily="34" charset="0"/>
+                <a:ea typeface="Calibri" pitchFamily="34" charset="-122"/>
+                <a:cs typeface="Calibri" pitchFamily="34" charset="-120"/>
+              </a:rPr>
+              <a:t>E. Rouleaux; saline replacement</a:t>
+            </a:r>
+            <a:endParaRPr lang="en-US" sz="1350" dirty="0"/>
+          </a:p>
+        </p:txBody>
+      </p:sp>
+      <p:sp>
+        <p:nvSpPr>
+          <p:cNvPr id="6" name="Shape 4"/>
+          <p:cNvSpPr/>
+          <p:nvPr/>
+        </p:nvSpPr>
+        <p:spPr>
+          <a:xfrm>
+            <a:off x="7201632" y="2395728"/>
+            <a:ext cx="4423136" cy="3246120"/>
+          </a:xfrm>
+          <a:prstGeom prst="roundRect">
+            <a:avLst>
+              <a:gd name="adj" fmla="val 2535"/>
+            </a:avLst>
+          </a:prstGeom>
+          <a:solidFill>
+            <a:srgbClr val="F8E7EF"/>
+          </a:solidFill>
+          <a:ln/>
+          <a:effectLst>
+            <a:outerShdw sx="100000" sy="100000" kx="0" ky="0" algn="bl" rotWithShape="0" blurRad="88900" dist="25400" dir="5400000">
+              <a:srgbClr val="22303C">
+                <a:alpha val="12000"/>
+              </a:srgbClr>
+            </a:outerShdw>
+          </a:effectLst>
+        </p:spPr>
+        <p:txBody>
+          <a:bodyPr/>
+          <a:p/>
+        </p:txBody>
+      </p:sp>
+      <p:sp>
+        <p:nvSpPr>
+          <p:cNvPr id="7" name="Text 5"/>
+          <p:cNvSpPr/>
+          <p:nvPr/>
+        </p:nvSpPr>
+        <p:spPr>
+          <a:xfrm>
+            <a:off x="7439376" y="2578608"/>
+            <a:ext cx="3965936" cy="457200"/>
+          </a:xfrm>
+          <a:prstGeom prst="rect">
+            <a:avLst/>
+          </a:prstGeom>
+          <a:noFill/>
+          <a:ln/>
+        </p:spPr>
+        <p:txBody>
+          <a:bodyPr wrap="square" lIns="0" tIns="0" rIns="0" bIns="0" rtlCol="0" anchor="ctr"/>
+          <a:lstStyle/>
+          <a:p>
+            <a:pPr indent="0" marL="0">
+              <a:buNone/>
+            </a:pPr>
+            <a:r>
+              <a:rPr lang="en-US" sz="1500" b="1" dirty="0">
+                <a:solidFill>
+                  <a:srgbClr val="AD1457"/>
+                </a:solidFill>
+                <a:latin typeface="Calibri" pitchFamily="34" charset="0"/>
+                <a:ea typeface="Calibri" pitchFamily="34" charset="-122"/>
+                <a:cs typeface="Calibri" pitchFamily="34" charset="-120"/>
+              </a:rPr>
+              <a:t>ANSWER  </a:t>
+            </a:r>
+            <a:pPr indent="0" marL="0">
+              <a:buNone/>
+            </a:pPr>
+            <a:r>
+              <a:rPr lang="en-US" sz="1500" b="1" dirty="0">
+                <a:solidFill>
+                  <a:srgbClr val="1B2A38"/>
+                </a:solidFill>
+                <a:latin typeface="Calibri" pitchFamily="34" charset="0"/>
+                <a:ea typeface="Calibri" pitchFamily="34" charset="-122"/>
+                <a:cs typeface="Calibri" pitchFamily="34" charset="-120"/>
+              </a:rPr>
+              <a:t>B — Dosage; rule out on homozygous cells</a:t>
+            </a:r>
+            <a:endParaRPr lang="en-US" sz="1500" dirty="0"/>
+          </a:p>
+        </p:txBody>
+      </p:sp>
+      <p:sp>
+        <p:nvSpPr>
+          <p:cNvPr id="8" name="Text 6"/>
+          <p:cNvSpPr/>
+          <p:nvPr/>
+        </p:nvSpPr>
+        <p:spPr>
+          <a:xfrm>
+            <a:off x="7439376" y="3127248"/>
+            <a:ext cx="3947648" cy="2377440"/>
+          </a:xfrm>
+          <a:prstGeom prst="rect">
+            <a:avLst/>
+          </a:prstGeom>
+          <a:noFill/>
+          <a:ln/>
+        </p:spPr>
+        <p:txBody>
+          <a:bodyPr wrap="square" lIns="0" tIns="0" rIns="0" bIns="0" rtlCol="0" anchor="t"/>
+          <a:lstStyle/>
+          <a:p>
+            <a:pPr algn="l" indent="0" marL="0">
+              <a:lnSpc>
+                <a:spcPct val="108000"/>
+              </a:lnSpc>
+              <a:buNone/>
+            </a:pPr>
+            <a:r>
+              <a:rPr lang="en-US" sz="1250" dirty="0">
+                <a:solidFill>
+                  <a:srgbClr val="33444F"/>
+                </a:solidFill>
+                <a:latin typeface="Calibri" pitchFamily="34" charset="0"/>
+                <a:ea typeface="Calibri" pitchFamily="34" charset="-122"/>
+                <a:cs typeface="Calibri" pitchFamily="34" charset="-120"/>
+              </a:rPr>
+              <a:t>Kidd shows dosage: Jk(a+b–) is double-dose Jka and reacts more strongly than single-dose Jk(a+b+). Antibodies to dosage systems (Kidd, Duffy, Rh, MNS) must be ruled out on homozygous cells.</a:t>
+            </a:r>
+            <a:endParaRPr lang="en-US" sz="1250" dirty="0"/>
+          </a:p>
+        </p:txBody>
+      </p:sp>
+      <p:sp>
+        <p:nvSpPr>
+          <p:cNvPr id="9" name="Text 7"/>
+          <p:cNvSpPr/>
+          <p:nvPr/>
+        </p:nvSpPr>
+        <p:spPr>
+          <a:xfrm>
+            <a:off x="566928" y="6473952"/>
+            <a:ext cx="7772400" cy="274320"/>
+          </a:xfrm>
+          <a:prstGeom prst="rect">
+            <a:avLst/>
+          </a:prstGeom>
+          <a:noFill/>
+          <a:ln/>
+        </p:spPr>
+        <p:txBody>
+          <a:bodyPr wrap="square" lIns="0" tIns="0" rIns="0" bIns="0" rtlCol="0" anchor="ctr"/>
+          <a:lstStyle/>
+          <a:p>
+            <a:pPr algn="l" indent="0" marL="0">
+              <a:buNone/>
+            </a:pPr>
+            <a:r>
+              <a:rPr lang="en-US" sz="850" dirty="0">
+                <a:solidFill>
+                  <a:srgbClr val="9AA8B4"/>
+                </a:solidFill>
+                <a:latin typeface="Calibri" pitchFamily="34" charset="0"/>
+                <a:ea typeface="Calibri" pitchFamily="34" charset="-122"/>
+                <a:cs typeface="Calibri" pitchFamily="34" charset="-120"/>
+              </a:rPr>
+              <a:t>Makassed General Hospital  ·  Department of Laboratory Medicine</a:t>
+            </a:r>
+            <a:endParaRPr lang="en-US" sz="850" dirty="0"/>
+          </a:p>
+        </p:txBody>
+      </p:sp>
+      <p:sp>
+        <p:nvSpPr>
+          <p:cNvPr id="10" name="Text 8"/>
+          <p:cNvSpPr/>
+          <p:nvPr/>
+        </p:nvSpPr>
+        <p:spPr>
+          <a:xfrm>
+            <a:off x="9814255" y="6473952"/>
+            <a:ext cx="1828800" cy="274320"/>
+          </a:xfrm>
+          <a:prstGeom prst="rect">
+            <a:avLst/>
+          </a:prstGeom>
+          <a:noFill/>
+          <a:ln/>
+        </p:spPr>
+        <p:txBody>
+          <a:bodyPr wrap="square" lIns="0" tIns="0" rIns="0" bIns="0" rtlCol="0" anchor="ctr"/>
+          <a:lstStyle/>
+          <a:p>
+            <a:pPr algn="r" indent="0" marL="0">
+              <a:buNone/>
+            </a:pPr>
+            <a:r>
+              <a:rPr lang="en-US" sz="850" dirty="0">
+                <a:solidFill>
+                  <a:srgbClr val="9AA8B4"/>
+                </a:solidFill>
+                <a:latin typeface="Calibri" pitchFamily="34" charset="0"/>
+                <a:ea typeface="Calibri" pitchFamily="34" charset="-122"/>
+                <a:cs typeface="Calibri" pitchFamily="34" charset="-120"/>
+              </a:rPr>
+              <a:t>CP Lecture Series</a:t>
+            </a:r>
+            <a:pPr algn="r" indent="0" marL="0">
+              <a:buNone/>
+            </a:pPr>
+            <a:r>
+              <a:rPr lang="en-US" sz="850" dirty="0">
+                <a:solidFill>
+                  <a:srgbClr val="DCE4EC"/>
+                </a:solidFill>
+                <a:latin typeface="Calibri" pitchFamily="34" charset="0"/>
+                <a:ea typeface="Calibri" pitchFamily="34" charset="-122"/>
+                <a:cs typeface="Calibri" pitchFamily="34" charset="-120"/>
+              </a:rPr>
+              <a:t>   ·   </a:t>
+            </a:r>
+            <a:pPr algn="r" indent="0" marL="0">
+              <a:buNone/>
+            </a:pPr>
+            <a:r>
+              <a:rPr lang="en-US" sz="850" b="1" dirty="0">
+                <a:solidFill>
+                  <a:srgbClr val="AD1457"/>
+                </a:solidFill>
+                <a:latin typeface="Calibri" pitchFamily="34" charset="0"/>
+                <a:ea typeface="Calibri" pitchFamily="34" charset="-122"/>
+                <a:cs typeface="Calibri" pitchFamily="34" charset="-120"/>
+              </a:rPr>
+              <a:t>35</a:t>
+            </a:r>
+            <a:endParaRPr lang="en-US" sz="850" dirty="0"/>
+          </a:p>
+        </p:txBody>
+      </p:sp>
+    </p:spTree>
+  </p:cSld>
+  <p:clrMapOvr>
+    <a:masterClrMapping/>
+  </p:clrMapOvr>
+</p:sld>
+</file>
+
+<file path=ppt/slides/slide51.xml><?xml version="1.0" encoding="utf-8"?>
+<p:sld xmlns:a="http://schemas.openxmlformats.org/drawingml/2006/main" xmlns:p="http://schemas.openxmlformats.org/presentationml/2006/main" xmlns:r="http://schemas.openxmlformats.org/officeDocument/2006/relationships">
+  <p:cSld>
+    <p:spTree>
+      <p:nvGrpSpPr>
+        <p:cNvPr id="1" name=""/>
+        <p:cNvGrpSpPr/>
+        <p:nvPr/>
+      </p:nvGrpSpPr>
+      <p:grpSpPr/>
+      <p:sp>
+        <p:nvSpPr>
+          <p:cNvPr id="2" name="Text 0"/>
+          <p:cNvSpPr/>
+          <p:nvPr/>
+        </p:nvSpPr>
+        <p:spPr>
+          <a:xfrm>
+            <a:off x="566928" y="329184"/>
+            <a:ext cx="10515600" cy="310896"/>
+          </a:xfrm>
+          <a:prstGeom prst="rect">
+            <a:avLst/>
+          </a:prstGeom>
+          <a:noFill/>
+          <a:ln/>
+        </p:spPr>
+        <p:txBody>
+          <a:bodyPr wrap="square" lIns="0" tIns="0" rIns="0" bIns="0" rtlCol="0" anchor="ctr"/>
+          <a:lstStyle/>
+          <a:p>
+            <a:pPr algn="l" indent="0" marL="0">
+              <a:buNone/>
+            </a:pPr>
+            <a:r>
+              <a:rPr lang="en-US" sz="1100" b="1" spc="150" kern="0" dirty="0">
+                <a:solidFill>
+                  <a:srgbClr val="AD1457"/>
+                </a:solidFill>
+                <a:latin typeface="Calibri" pitchFamily="34" charset="0"/>
+                <a:ea typeface="Calibri" pitchFamily="34" charset="-122"/>
+                <a:cs typeface="Calibri" pitchFamily="34" charset="-120"/>
+              </a:rPr>
+              <a:t>TRANSFUSION MEDICINE   ·   BOARD REVIEW  ·  Q1</a:t>
+            </a:r>
+            <a:endParaRPr lang="en-US" sz="1100" dirty="0"/>
+          </a:p>
+        </p:txBody>
+      </p:sp>
+      <p:sp>
+        <p:nvSpPr>
+          <p:cNvPr id="3" name="Text 1"/>
+          <p:cNvSpPr/>
+          <p:nvPr/>
+        </p:nvSpPr>
+        <p:spPr>
+          <a:xfrm>
+            <a:off x="566928" y="713232"/>
+            <a:ext cx="11064240" cy="749808"/>
+          </a:xfrm>
+          <a:prstGeom prst="rect">
+            <a:avLst/>
+          </a:prstGeom>
+          <a:noFill/>
+          <a:ln/>
+        </p:spPr>
+        <p:txBody>
+          <a:bodyPr wrap="square" lIns="0" tIns="0" rIns="0" bIns="0" rtlCol="0" anchor="ctr"/>
+          <a:lstStyle/>
+          <a:p>
+            <a:pPr algn="l" indent="0" marL="0">
+              <a:buNone/>
+            </a:pPr>
+            <a:r>
+              <a:rPr lang="en-US" sz="2600" b="1" dirty="0">
+                <a:solidFill>
+                  <a:srgbClr val="0E3A5F"/>
+                </a:solidFill>
+                <a:latin typeface="Calibri" pitchFamily="34" charset="0"/>
+                <a:ea typeface="Calibri" pitchFamily="34" charset="-122"/>
+                <a:cs typeface="Calibri" pitchFamily="34" charset="-120"/>
+              </a:rPr>
+              <a:t>Board-Style Review</a:t>
+            </a:r>
+            <a:endParaRPr lang="en-US" sz="2600" dirty="0"/>
+          </a:p>
+        </p:txBody>
+      </p:sp>
+      <p:sp>
+        <p:nvSpPr>
+          <p:cNvPr id="4" name="Text 2"/>
+          <p:cNvSpPr/>
+          <p:nvPr/>
+        </p:nvSpPr>
+        <p:spPr>
+          <a:xfrm>
+            <a:off x="566928" y="1417320"/>
+            <a:ext cx="11057839" cy="914400"/>
+          </a:xfrm>
+          <a:prstGeom prst="rect">
+            <a:avLst/>
+          </a:prstGeom>
+          <a:noFill/>
+          <a:ln/>
+        </p:spPr>
+        <p:txBody>
+          <a:bodyPr wrap="square" lIns="0" tIns="0" rIns="0" bIns="0" rtlCol="0" anchor="t"/>
+          <a:lstStyle/>
+          <a:p>
+            <a:pPr algn="l" indent="0" marL="0">
+              <a:lnSpc>
+                <a:spcPct val="105000"/>
+              </a:lnSpc>
+              <a:buNone/>
+            </a:pPr>
+            <a:r>
+              <a:rPr lang="en-US" sz="1450" b="1" dirty="0">
+                <a:solidFill>
+                  <a:srgbClr val="1B2A38"/>
+                </a:solidFill>
+                <a:latin typeface="Calibri" pitchFamily="34" charset="0"/>
+                <a:ea typeface="Calibri" pitchFamily="34" charset="-122"/>
+                <a:cs typeface="Calibri" pitchFamily="34" charset="-120"/>
+              </a:rPr>
+              <a:t>During panel workup, an antibody reacts with untreated cells but the reaction is abolished on ficin-treated cells. Which specificity is most consistent?</a:t>
+            </a:r>
+            <a:endParaRPr lang="en-US" sz="1450" dirty="0"/>
+          </a:p>
+        </p:txBody>
+      </p:sp>
+      <p:sp>
+        <p:nvSpPr>
+          <p:cNvPr id="5" name="Text 3"/>
+          <p:cNvSpPr/>
+          <p:nvPr/>
+        </p:nvSpPr>
+        <p:spPr>
+          <a:xfrm>
+            <a:off x="658368" y="2395728"/>
+            <a:ext cx="6192390" cy="3017520"/>
+          </a:xfrm>
+          <a:prstGeom prst="rect">
+            <a:avLst/>
+          </a:prstGeom>
+          <a:noFill/>
+          <a:ln/>
+        </p:spPr>
+        <p:txBody>
+          <a:bodyPr wrap="square" lIns="0" tIns="0" rIns="0" bIns="0" rtlCol="0" anchor="t"/>
+          <a:lstStyle/>
+          <a:p>
+            <a:pPr algn="l" indent="0" marL="0">
+              <a:spcAft>
+                <a:spcPts val="600"/>
+              </a:spcAft>
+              <a:buNone/>
+            </a:pPr>
+            <a:r>
+              <a:rPr lang="en-US" sz="1350" dirty="0">
+                <a:solidFill>
+                  <a:srgbClr val="33444F"/>
+                </a:solidFill>
+                <a:latin typeface="Calibri" pitchFamily="34" charset="0"/>
+                <a:ea typeface="Calibri" pitchFamily="34" charset="-122"/>
+                <a:cs typeface="Calibri" pitchFamily="34" charset="-120"/>
+              </a:rPr>
+              <a:t>A. Anti-Jka</a:t>
+            </a:r>
+            <a:endParaRPr lang="en-US" sz="1350" dirty="0"/>
+          </a:p>
+          <a:p>
+            <a:pPr algn="l" indent="0" marL="0">
+              <a:spcAft>
+                <a:spcPts val="600"/>
+              </a:spcAft>
+              <a:buNone/>
+            </a:pPr>
+            <a:r>
+              <a:rPr lang="en-US" sz="1350" dirty="0">
+                <a:solidFill>
+                  <a:srgbClr val="33444F"/>
+                </a:solidFill>
+                <a:latin typeface="Calibri" pitchFamily="34" charset="0"/>
+                <a:ea typeface="Calibri" pitchFamily="34" charset="-122"/>
+                <a:cs typeface="Calibri" pitchFamily="34" charset="-120"/>
+              </a:rPr>
+              <a:t>B. Anti-E</a:t>
+            </a:r>
+            <a:endParaRPr lang="en-US" sz="1350" dirty="0"/>
+          </a:p>
+          <a:p>
+            <a:pPr algn="l" indent="0" marL="0">
+              <a:spcAft>
+                <a:spcPts val="600"/>
+              </a:spcAft>
+              <a:buNone/>
+            </a:pPr>
+            <a:r>
+              <a:rPr lang="en-US" sz="1350" b="1" dirty="0">
+                <a:solidFill>
+                  <a:srgbClr val="7A0E3C"/>
+                </a:solidFill>
+                <a:latin typeface="Calibri" pitchFamily="34" charset="0"/>
+                <a:ea typeface="Calibri" pitchFamily="34" charset="-122"/>
+                <a:cs typeface="Calibri" pitchFamily="34" charset="-120"/>
+              </a:rPr>
+              <a:t>C. Anti-Fya</a:t>
+            </a:r>
+            <a:endParaRPr lang="en-US" sz="1350" dirty="0"/>
+          </a:p>
+          <a:p>
+            <a:pPr algn="l" indent="0" marL="0">
+              <a:spcAft>
+                <a:spcPts val="600"/>
+              </a:spcAft>
+              <a:buNone/>
+            </a:pPr>
+            <a:r>
+              <a:rPr lang="en-US" sz="1350" dirty="0">
+                <a:solidFill>
+                  <a:srgbClr val="33444F"/>
+                </a:solidFill>
+                <a:latin typeface="Calibri" pitchFamily="34" charset="0"/>
+                <a:ea typeface="Calibri" pitchFamily="34" charset="-122"/>
+                <a:cs typeface="Calibri" pitchFamily="34" charset="-120"/>
+              </a:rPr>
+              <a:t>D. Anti-K</a:t>
+            </a:r>
+            <a:endParaRPr lang="en-US" sz="1350" dirty="0"/>
+          </a:p>
+          <a:p>
+            <a:pPr algn="l" indent="0" marL="0">
+              <a:spcAft>
+                <a:spcPts val="600"/>
+              </a:spcAft>
+              <a:buNone/>
+            </a:pPr>
+            <a:r>
+              <a:rPr lang="en-US" sz="1350" dirty="0">
+                <a:solidFill>
+                  <a:srgbClr val="33444F"/>
+                </a:solidFill>
+                <a:latin typeface="Calibri" pitchFamily="34" charset="0"/>
+                <a:ea typeface="Calibri" pitchFamily="34" charset="-122"/>
+                <a:cs typeface="Calibri" pitchFamily="34" charset="-120"/>
+              </a:rPr>
+              <a:t>E. Anti-Lea</a:t>
+            </a:r>
+            <a:endParaRPr lang="en-US" sz="1350" dirty="0"/>
+          </a:p>
+        </p:txBody>
+      </p:sp>
+      <p:sp>
+        <p:nvSpPr>
+          <p:cNvPr id="6" name="Shape 4"/>
+          <p:cNvSpPr/>
+          <p:nvPr/>
+        </p:nvSpPr>
+        <p:spPr>
+          <a:xfrm>
+            <a:off x="7201632" y="2395728"/>
+            <a:ext cx="4423136" cy="3246120"/>
+          </a:xfrm>
+          <a:prstGeom prst="roundRect">
+            <a:avLst>
+              <a:gd name="adj" fmla="val 2535"/>
+            </a:avLst>
+          </a:prstGeom>
+          <a:solidFill>
+            <a:srgbClr val="F8E7EF"/>
+          </a:solidFill>
+          <a:ln/>
+          <a:effectLst>
+            <a:outerShdw sx="100000" sy="100000" kx="0" ky="0" algn="bl" rotWithShape="0" blurRad="88900" dist="25400" dir="5400000">
+              <a:srgbClr val="22303C">
+                <a:alpha val="12000"/>
+              </a:srgbClr>
+            </a:outerShdw>
+          </a:effectLst>
+        </p:spPr>
+        <p:txBody>
+          <a:bodyPr/>
+          <a:p/>
+        </p:txBody>
+      </p:sp>
+      <p:sp>
+        <p:nvSpPr>
+          <p:cNvPr id="7" name="Text 5"/>
+          <p:cNvSpPr/>
+          <p:nvPr/>
+        </p:nvSpPr>
+        <p:spPr>
+          <a:xfrm>
+            <a:off x="7439376" y="2578608"/>
+            <a:ext cx="3965936" cy="457200"/>
+          </a:xfrm>
+          <a:prstGeom prst="rect">
+            <a:avLst/>
+          </a:prstGeom>
+          <a:noFill/>
+          <a:ln/>
+        </p:spPr>
+        <p:txBody>
+          <a:bodyPr wrap="square" lIns="0" tIns="0" rIns="0" bIns="0" rtlCol="0" anchor="ctr"/>
+          <a:lstStyle/>
+          <a:p>
+            <a:pPr indent="0" marL="0">
+              <a:buNone/>
+            </a:pPr>
+            <a:r>
+              <a:rPr lang="en-US" sz="1500" b="1" dirty="0">
+                <a:solidFill>
+                  <a:srgbClr val="AD1457"/>
+                </a:solidFill>
+                <a:latin typeface="Calibri" pitchFamily="34" charset="0"/>
+                <a:ea typeface="Calibri" pitchFamily="34" charset="-122"/>
+                <a:cs typeface="Calibri" pitchFamily="34" charset="-120"/>
+              </a:rPr>
+              <a:t>ANSWER  </a:t>
+            </a:r>
+            <a:pPr indent="0" marL="0">
+              <a:buNone/>
+            </a:pPr>
+            <a:r>
+              <a:rPr lang="en-US" sz="1500" b="1" dirty="0">
+                <a:solidFill>
+                  <a:srgbClr val="1B2A38"/>
+                </a:solidFill>
+                <a:latin typeface="Calibri" pitchFamily="34" charset="0"/>
+                <a:ea typeface="Calibri" pitchFamily="34" charset="-122"/>
+                <a:cs typeface="Calibri" pitchFamily="34" charset="-120"/>
+              </a:rPr>
+              <a:t>C — Anti-Fya</a:t>
+            </a:r>
+            <a:endParaRPr lang="en-US" sz="1500" dirty="0"/>
+          </a:p>
+        </p:txBody>
+      </p:sp>
+      <p:sp>
+        <p:nvSpPr>
+          <p:cNvPr id="8" name="Text 6"/>
+          <p:cNvSpPr/>
+          <p:nvPr/>
+        </p:nvSpPr>
+        <p:spPr>
+          <a:xfrm>
+            <a:off x="7439376" y="3127248"/>
+            <a:ext cx="3947648" cy="2377440"/>
+          </a:xfrm>
+          <a:prstGeom prst="rect">
+            <a:avLst/>
+          </a:prstGeom>
+          <a:noFill/>
+          <a:ln/>
+        </p:spPr>
+        <p:txBody>
+          <a:bodyPr wrap="square" lIns="0" tIns="0" rIns="0" bIns="0" rtlCol="0" anchor="t"/>
+          <a:lstStyle/>
+          <a:p>
+            <a:pPr algn="l" indent="0" marL="0">
+              <a:lnSpc>
+                <a:spcPct val="108000"/>
+              </a:lnSpc>
+              <a:buNone/>
+            </a:pPr>
+            <a:r>
+              <a:rPr lang="en-US" sz="1250" dirty="0">
+                <a:solidFill>
+                  <a:srgbClr val="33444F"/>
+                </a:solidFill>
+                <a:latin typeface="Calibri" pitchFamily="34" charset="0"/>
+                <a:ea typeface="Calibri" pitchFamily="34" charset="-122"/>
+                <a:cs typeface="Calibri" pitchFamily="34" charset="-120"/>
+              </a:rPr>
+              <a:t>Ficin/papain destroy Duffy (and MNS) antigens, abolishing their reactivity, while enhancing Rh, Kidd, Lewis, P1, and I. Kell is enzyme-resistant. So loss on ficin points to Duffy.</a:t>
+            </a:r>
+            <a:endParaRPr lang="en-US" sz="1250" dirty="0"/>
+          </a:p>
+        </p:txBody>
+      </p:sp>
+      <p:sp>
+        <p:nvSpPr>
+          <p:cNvPr id="9" name="Text 7"/>
+          <p:cNvSpPr/>
+          <p:nvPr/>
+        </p:nvSpPr>
+        <p:spPr>
+          <a:xfrm>
+            <a:off x="566928" y="6473952"/>
+            <a:ext cx="7772400" cy="274320"/>
+          </a:xfrm>
+          <a:prstGeom prst="rect">
+            <a:avLst/>
+          </a:prstGeom>
+          <a:noFill/>
+          <a:ln/>
+        </p:spPr>
+        <p:txBody>
+          <a:bodyPr wrap="square" lIns="0" tIns="0" rIns="0" bIns="0" rtlCol="0" anchor="ctr"/>
+          <a:lstStyle/>
+          <a:p>
+            <a:pPr algn="l" indent="0" marL="0">
+              <a:buNone/>
+            </a:pPr>
+            <a:r>
+              <a:rPr lang="en-US" sz="850" dirty="0">
+                <a:solidFill>
+                  <a:srgbClr val="9AA8B4"/>
+                </a:solidFill>
+                <a:latin typeface="Calibri" pitchFamily="34" charset="0"/>
+                <a:ea typeface="Calibri" pitchFamily="34" charset="-122"/>
+                <a:cs typeface="Calibri" pitchFamily="34" charset="-120"/>
+              </a:rPr>
+              <a:t>Makassed General Hospital  ·  Department of Laboratory Medicine</a:t>
+            </a:r>
+            <a:endParaRPr lang="en-US" sz="850" dirty="0"/>
+          </a:p>
+        </p:txBody>
+      </p:sp>
+      <p:sp>
+        <p:nvSpPr>
+          <p:cNvPr id="10" name="Text 8"/>
+          <p:cNvSpPr/>
+          <p:nvPr/>
+        </p:nvSpPr>
+        <p:spPr>
+          <a:xfrm>
+            <a:off x="9814255" y="6473952"/>
+            <a:ext cx="1828800" cy="274320"/>
+          </a:xfrm>
+          <a:prstGeom prst="rect">
+            <a:avLst/>
+          </a:prstGeom>
+          <a:noFill/>
+          <a:ln/>
+        </p:spPr>
+        <p:txBody>
+          <a:bodyPr wrap="square" lIns="0" tIns="0" rIns="0" bIns="0" rtlCol="0" anchor="ctr"/>
+          <a:lstStyle/>
+          <a:p>
+            <a:pPr algn="r" indent="0" marL="0">
+              <a:buNone/>
+            </a:pPr>
+            <a:r>
+              <a:rPr lang="en-US" sz="850" dirty="0">
+                <a:solidFill>
+                  <a:srgbClr val="9AA8B4"/>
+                </a:solidFill>
+                <a:latin typeface="Calibri" pitchFamily="34" charset="0"/>
+                <a:ea typeface="Calibri" pitchFamily="34" charset="-122"/>
+                <a:cs typeface="Calibri" pitchFamily="34" charset="-120"/>
+              </a:rPr>
+              <a:t>CP Lecture Series</a:t>
+            </a:r>
+            <a:pPr algn="r" indent="0" marL="0">
+              <a:buNone/>
+            </a:pPr>
+            <a:r>
+              <a:rPr lang="en-US" sz="850" dirty="0">
+                <a:solidFill>
+                  <a:srgbClr val="DCE4EC"/>
+                </a:solidFill>
+                <a:latin typeface="Calibri" pitchFamily="34" charset="0"/>
+                <a:ea typeface="Calibri" pitchFamily="34" charset="-122"/>
+                <a:cs typeface="Calibri" pitchFamily="34" charset="-120"/>
+              </a:rPr>
+              <a:t>   ·   </a:t>
+            </a:r>
+            <a:pPr algn="r" indent="0" marL="0">
+              <a:buNone/>
+            </a:pPr>
+            <a:r>
+              <a:rPr lang="en-US" sz="850" b="1" dirty="0">
+                <a:solidFill>
+                  <a:srgbClr val="AD1457"/>
+                </a:solidFill>
+                <a:latin typeface="Calibri" pitchFamily="34" charset="0"/>
+                <a:ea typeface="Calibri" pitchFamily="34" charset="-122"/>
+                <a:cs typeface="Calibri" pitchFamily="34" charset="-120"/>
+              </a:rPr>
+              <a:t>34</a:t>
+            </a:r>
+            <a:endParaRPr lang="en-US" sz="850" dirty="0"/>
           </a:p>
         </p:txBody>
       </p:sp>
@@ -29561,6 +31521,10 @@
             </a:outerShdw>
           </a:effectLst>
         </p:spPr>
+        <p:txBody>
+          <a:bodyPr/>
+          <a:p/>
+        </p:txBody>
       </p:sp>
       <p:sp>
         <p:nvSpPr>
@@ -29641,6 +31605,10 @@
             <a:tailEnd type="triangle"/>
           </a:ln>
         </p:spPr>
+        <p:txBody>
+          <a:bodyPr/>
+          <a:p/>
+        </p:txBody>
       </p:sp>
       <p:sp>
         <p:nvSpPr>
@@ -29675,6 +31643,10 @@
             </a:outerShdw>
           </a:effectLst>
         </p:spPr>
+        <p:txBody>
+          <a:bodyPr/>
+          <a:p/>
+        </p:txBody>
       </p:sp>
       <p:sp>
         <p:nvSpPr>
@@ -29765,6 +31737,10 @@
             </a:outerShdw>
           </a:effectLst>
         </p:spPr>
+        <p:txBody>
+          <a:bodyPr/>
+          <a:p/>
+        </p:txBody>
       </p:sp>
       <p:sp>
         <p:nvSpPr>
@@ -30134,6 +32110,10 @@
             </a:outerShdw>
           </a:effectLst>
         </p:spPr>
+        <p:txBody>
+          <a:bodyPr/>
+          <a:p/>
+        </p:txBody>
       </p:sp>
       <p:sp>
         <p:nvSpPr>
@@ -30329,6 +32309,10 @@
             </a:outerShdw>
           </a:effectLst>
         </p:spPr>
+        <p:txBody>
+          <a:bodyPr/>
+          <a:p/>
+        </p:txBody>
       </p:sp>
       <p:sp>
         <p:nvSpPr>
@@ -30719,6 +32703,10 @@
             </a:outerShdw>
           </a:effectLst>
         </p:spPr>
+        <p:txBody>
+          <a:bodyPr/>
+          <a:p/>
+        </p:txBody>
       </p:sp>
       <p:sp>
         <p:nvSpPr>
@@ -30872,6 +32860,10 @@
             </a:outerShdw>
           </a:effectLst>
         </p:spPr>
+        <p:txBody>
+          <a:bodyPr/>
+          <a:p/>
+        </p:txBody>
       </p:sp>
       <p:sp>
         <p:nvSpPr>
